--- a/public/docs/Virasat-Team-USV-Deck.pptx
+++ b/public/docs/Virasat-Team-USV-Deck.pptx
@@ -10206,7 +10206,7 @@
                 <a:ea typeface="Calibri" pitchFamily="34" charset="-122"/>
                 <a:cs typeface="Calibri" pitchFamily="34" charset="-120"/>
               </a:rPr>
-              <a:t>99 to 100 desktop, 91 to 92 on a throttled phone. 100 accessibility, best practices and SEO on both, no layout shift.</a:t>
+              <a:t>99 to 100 desktop, 91 to 96 on a throttled phone. 100 accessibility, best practices and SEO on both, and layout shift under a quarter of the 0.1 threshold.</a:t>
             </a:r>
             <a:endParaRPr lang="en-US" sz="850" dirty="0"/>
           </a:p>

--- a/public/docs/Virasat-Team-USV-Deck.pptx
+++ b/public/docs/Virasat-Team-USV-Deck.pptx
@@ -10206,7 +10206,7 @@
                 <a:ea typeface="Calibri" pitchFamily="34" charset="-122"/>
                 <a:cs typeface="Calibri" pitchFamily="34" charset="-120"/>
               </a:rPr>
-              <a:t>99 to 100 desktop, 91 to 96 on a throttled phone. 100 accessibility, best practices and SEO on both, and layout shift under a quarter of the 0.1 threshold.</a:t>
+              <a:t>99 to 100 desktop, never below 90 on a throttled phone. 100 accessibility, best practices and SEO on both, and layout shift under a quarter of the 0.1 threshold.</a:t>
             </a:r>
             <a:endParaRPr lang="en-US" sz="850" dirty="0"/>
           </a:p>

--- a/public/docs/Virasat-Team-USV-Deck.pptx
+++ b/public/docs/Virasat-Team-USV-Deck.pptx
@@ -4102,7 +4102,7 @@
                 <a:ea typeface="Calibri" pitchFamily="34" charset="-122"/>
                 <a:cs typeface="Calibri" pitchFamily="34" charset="-120"/>
               </a:rPr>
-              <a:t>05  ·  PRODUCT DEMONSTRATION: FOR JUDGES</a:t>
+              <a:t>EVALUATION CRITERIA, MAPPED</a:t>
             </a:r>
             <a:endParaRPr lang="en-US" sz="1100" dirty="0"/>
           </a:p>
@@ -5239,7 +5239,7 @@
                 <a:ea typeface="Cambria" pitchFamily="34" charset="-122"/>
                 <a:cs typeface="Cambria" pitchFamily="34" charset="-120"/>
               </a:rPr>
-              <a:t>23 tests</a:t>
+              <a:t>47 tests</a:t>
             </a:r>
             <a:endParaRPr lang="en-US" sz="2400" dirty="0"/>
           </a:p>
@@ -7393,7 +7393,7 @@
                 <a:ea typeface="Calibri" pitchFamily="34" charset="-122"/>
                 <a:cs typeface="Calibri" pitchFamily="34" charset="-120"/>
               </a:rPr>
-              <a:t>05  ·  PRODUCT DEMONSTRATION</a:t>
+              <a:t>03  ·  INNOVATION</a:t>
             </a:r>
             <a:endParaRPr lang="en-US" sz="1100" dirty="0"/>
           </a:p>
@@ -7424,7 +7424,7 @@
               <a:buNone/>
             </a:pPr>
             <a:r>
-              <a:rPr lang="en-US" sz="2400" b="1" dirty="0">
+              <a:rPr lang="en-US" sz="2600" b="1" dirty="0">
                 <a:solidFill>
                   <a:srgbClr val="1B2424"/>
                 </a:solidFill>
@@ -7432,9 +7432,9 @@
                 <a:ea typeface="Cambria" pitchFamily="34" charset="-122"/>
                 <a:cs typeface="Cambria" pitchFamily="34" charset="-120"/>
               </a:rPr>
-              <a:t>This is the working product, not a mock-up</a:t>
-            </a:r>
-            <a:endParaRPr lang="en-US" sz="2400" dirty="0"/>
+              <a:t>Four things that exist nowhere else</a:t>
+            </a:r>
+            <a:endParaRPr lang="en-US" sz="2600" dirty="0"/>
           </a:p>
         </p:txBody>
       </p:sp>
@@ -7446,16 +7446,634 @@
         </p:nvSpPr>
         <p:spPr>
           <a:xfrm>
-            <a:off x="420624" y="1289304"/>
-            <a:ext cx="4096512" cy="2907792"/>
+            <a:off x="457200" y="1371600"/>
+            <a:ext cx="502920" cy="502920"/>
+          </a:xfrm>
+          <a:prstGeom prst="ellipse">
+            <a:avLst/>
+          </a:prstGeom>
+          <a:solidFill>
+            <a:srgbClr val="0F3D3E"/>
+          </a:solidFill>
+          <a:ln w="12700">
+            <a:solidFill>
+              <a:srgbClr val="0F3D3E"/>
+            </a:solidFill>
+            <a:prstDash val="solid"/>
+          </a:ln>
+        </p:spPr>
+      </p:sp>
+      <p:pic>
+        <p:nvPicPr>
+          <p:cNvPr id="5" name="Image 0" descr="preencoded.png">    </p:cNvPr>
+          <p:cNvPicPr>
+            <a:picLocks noChangeAspect="1"/>
+          </p:cNvPicPr>
+          <p:nvPr/>
+        </p:nvPicPr>
+        <p:blipFill>
+          <a:blip r:embed="rId1"/>
+          <a:stretch>
+            <a:fillRect/>
+          </a:stretch>
+        </p:blipFill>
+        <p:spPr>
+          <a:xfrm>
+            <a:off x="587959" y="1502359"/>
+            <a:ext cx="241402" cy="241402"/>
+          </a:xfrm>
+          <a:prstGeom prst="rect">
+            <a:avLst/>
+          </a:prstGeom>
+        </p:spPr>
+      </p:pic>
+      <p:sp>
+        <p:nvSpPr>
+          <p:cNvPr id="6" name="Text 3"/>
+          <p:cNvSpPr txBox="1"/>
+          <p:nvPr/>
+        </p:nvSpPr>
+        <p:spPr>
+          <a:xfrm>
+            <a:off x="1143000" y="1353312"/>
+            <a:ext cx="7498080" cy="274320"/>
+          </a:xfrm>
+          <a:prstGeom prst="rect">
+            <a:avLst/>
+          </a:prstGeom>
+          <a:noFill/>
+          <a:ln/>
+        </p:spPr>
+        <p:txBody>
+          <a:bodyPr wrap="square" lIns="0" tIns="0" rIns="0" bIns="0" rtlCol="0" anchor="t"/>
+          <a:lstStyle/>
+          <a:p>
+            <a:pPr indent="0" marL="0">
+              <a:buNone/>
+            </a:pPr>
+            <a:r>
+              <a:rPr lang="en-US" sz="1400" b="1" dirty="0">
+                <a:solidFill>
+                  <a:srgbClr val="0F3D3E"/>
+                </a:solidFill>
+                <a:latin typeface="Calibri" pitchFamily="34" charset="0"/>
+                <a:ea typeface="Calibri" pitchFamily="34" charset="-122"/>
+                <a:cs typeface="Calibri" pitchFamily="34" charset="-120"/>
+              </a:rPr>
+              <a:t>The tax statement becomes an asset map</a:t>
+            </a:r>
+            <a:endParaRPr lang="en-US" sz="1400" dirty="0"/>
+          </a:p>
+        </p:txBody>
+      </p:sp>
+      <p:sp>
+        <p:nvSpPr>
+          <p:cNvPr id="7" name="Text 4"/>
+          <p:cNvSpPr txBox="1"/>
+          <p:nvPr/>
+        </p:nvSpPr>
+        <p:spPr>
+          <a:xfrm>
+            <a:off x="1143000" y="1627632"/>
+            <a:ext cx="7498080" cy="548640"/>
+          </a:xfrm>
+          <a:prstGeom prst="rect">
+            <a:avLst/>
+          </a:prstGeom>
+          <a:noFill/>
+          <a:ln/>
+        </p:spPr>
+        <p:txBody>
+          <a:bodyPr wrap="square" lIns="0" tIns="0" rIns="0" bIns="0" rtlCol="0" anchor="t"/>
+          <a:lstStyle/>
+          <a:p>
+            <a:pPr indent="0" marL="0">
+              <a:buNone/>
+            </a:pPr>
+            <a:r>
+              <a:rPr lang="en-US" sz="1050" dirty="0">
+                <a:solidFill>
+                  <a:srgbClr val="1B2424"/>
+                </a:solidFill>
+                <a:latin typeface="Calibri" pitchFamily="34" charset="0"/>
+                <a:ea typeface="Calibri" pitchFamily="34" charset="-122"/>
+                <a:cs typeface="Calibri" pitchFamily="34" charset="-120"/>
+              </a:rPr>
+              <a:t>A legal heir can get the account holder's Annual Information Statement. It lists interest from every bank and dividends from every company. Virasat turns that one PDF into a list of places to claim from, even with no papers at all.</a:t>
+            </a:r>
+            <a:endParaRPr lang="en-US" sz="1050" dirty="0"/>
+          </a:p>
+        </p:txBody>
+      </p:sp>
+      <p:sp>
+        <p:nvSpPr>
+          <p:cNvPr id="8" name="Shape 5"/>
+          <p:cNvSpPr/>
+          <p:nvPr/>
+        </p:nvSpPr>
+        <p:spPr>
+          <a:xfrm>
+            <a:off x="457200" y="2221992"/>
+            <a:ext cx="502920" cy="502920"/>
+          </a:xfrm>
+          <a:prstGeom prst="ellipse">
+            <a:avLst/>
+          </a:prstGeom>
+          <a:solidFill>
+            <a:srgbClr val="E3A33B"/>
+          </a:solidFill>
+          <a:ln w="12700">
+            <a:solidFill>
+              <a:srgbClr val="E3A33B"/>
+            </a:solidFill>
+            <a:prstDash val="solid"/>
+          </a:ln>
+        </p:spPr>
+      </p:sp>
+      <p:pic>
+        <p:nvPicPr>
+          <p:cNvPr id="9" name="Image 1" descr="preencoded.png">    </p:cNvPr>
+          <p:cNvPicPr>
+            <a:picLocks noChangeAspect="1"/>
+          </p:cNvPicPr>
+          <p:nvPr/>
+        </p:nvPicPr>
+        <p:blipFill>
+          <a:blip r:embed="rId2"/>
+          <a:stretch>
+            <a:fillRect/>
+          </a:stretch>
+        </p:blipFill>
+        <p:spPr>
+          <a:xfrm>
+            <a:off x="587959" y="2352751"/>
+            <a:ext cx="241402" cy="241402"/>
+          </a:xfrm>
+          <a:prstGeom prst="rect">
+            <a:avLst/>
+          </a:prstGeom>
+        </p:spPr>
+      </p:pic>
+      <p:sp>
+        <p:nvSpPr>
+          <p:cNvPr id="10" name="Text 6"/>
+          <p:cNvSpPr txBox="1"/>
+          <p:nvPr/>
+        </p:nvSpPr>
+        <p:spPr>
+          <a:xfrm>
+            <a:off x="1143000" y="2203704"/>
+            <a:ext cx="7498080" cy="274320"/>
+          </a:xfrm>
+          <a:prstGeom prst="rect">
+            <a:avLst/>
+          </a:prstGeom>
+          <a:noFill/>
+          <a:ln/>
+        </p:spPr>
+        <p:txBody>
+          <a:bodyPr wrap="square" lIns="0" tIns="0" rIns="0" bIns="0" rtlCol="0" anchor="t"/>
+          <a:lstStyle/>
+          <a:p>
+            <a:pPr indent="0" marL="0">
+              <a:buNone/>
+            </a:pPr>
+            <a:r>
+              <a:rPr lang="en-US" sz="1400" b="1" dirty="0">
+                <a:solidFill>
+                  <a:srgbClr val="0F3D3E"/>
+                </a:solidFill>
+                <a:latin typeface="Calibri" pitchFamily="34" charset="0"/>
+                <a:ea typeface="Calibri" pitchFamily="34" charset="-122"/>
+                <a:cs typeface="Calibri" pitchFamily="34" charset="-120"/>
+              </a:rPr>
+              <a:t>The Two AI Debate</a:t>
+            </a:r>
+            <a:endParaRPr lang="en-US" sz="1400" dirty="0"/>
+          </a:p>
+        </p:txBody>
+      </p:sp>
+      <p:sp>
+        <p:nvSpPr>
+          <p:cNvPr id="11" name="Text 7"/>
+          <p:cNvSpPr txBox="1"/>
+          <p:nvPr/>
+        </p:nvSpPr>
+        <p:spPr>
+          <a:xfrm>
+            <a:off x="1143000" y="2478024"/>
+            <a:ext cx="7498080" cy="548640"/>
+          </a:xfrm>
+          <a:prstGeom prst="rect">
+            <a:avLst/>
+          </a:prstGeom>
+          <a:noFill/>
+          <a:ln/>
+        </p:spPr>
+        <p:txBody>
+          <a:bodyPr wrap="square" lIns="0" tIns="0" rIns="0" bIns="0" rtlCol="0" anchor="t"/>
+          <a:lstStyle/>
+          <a:p>
+            <a:pPr indent="0" marL="0">
+              <a:buNone/>
+            </a:pPr>
+            <a:r>
+              <a:rPr lang="en-US" sz="1050" dirty="0">
+                <a:solidFill>
+                  <a:srgbClr val="1B2424"/>
+                </a:solidFill>
+                <a:latin typeface="Calibri" pitchFamily="34" charset="0"/>
+                <a:ea typeface="Calibri" pitchFamily="34" charset="-122"/>
+                <a:cs typeface="Calibri" pitchFamily="34" charset="-120"/>
+              </a:rPr>
+              <a:t>One AI argues for the route, a second hunts for what could go wrong, a third gives the verdict with reasons and risks. The referee can only make advice more careful, never overrule the rules.</a:t>
+            </a:r>
+            <a:endParaRPr lang="en-US" sz="1050" dirty="0"/>
+          </a:p>
+        </p:txBody>
+      </p:sp>
+      <p:sp>
+        <p:nvSpPr>
+          <p:cNvPr id="12" name="Shape 8"/>
+          <p:cNvSpPr/>
+          <p:nvPr/>
+        </p:nvSpPr>
+        <p:spPr>
+          <a:xfrm>
+            <a:off x="457200" y="3072384"/>
+            <a:ext cx="502920" cy="502920"/>
+          </a:xfrm>
+          <a:prstGeom prst="ellipse">
+            <a:avLst/>
+          </a:prstGeom>
+          <a:solidFill>
+            <a:srgbClr val="0F3D3E"/>
+          </a:solidFill>
+          <a:ln w="12700">
+            <a:solidFill>
+              <a:srgbClr val="0F3D3E"/>
+            </a:solidFill>
+            <a:prstDash val="solid"/>
+          </a:ln>
+        </p:spPr>
+      </p:sp>
+      <p:pic>
+        <p:nvPicPr>
+          <p:cNvPr id="13" name="Image 2" descr="preencoded.png">    </p:cNvPr>
+          <p:cNvPicPr>
+            <a:picLocks noChangeAspect="1"/>
+          </p:cNvPicPr>
+          <p:nvPr/>
+        </p:nvPicPr>
+        <p:blipFill>
+          <a:blip r:embed="rId3"/>
+          <a:stretch>
+            <a:fillRect/>
+          </a:stretch>
+        </p:blipFill>
+        <p:spPr>
+          <a:xfrm>
+            <a:off x="587959" y="3203143"/>
+            <a:ext cx="241402" cy="241402"/>
+          </a:xfrm>
+          <a:prstGeom prst="rect">
+            <a:avLst/>
+          </a:prstGeom>
+        </p:spPr>
+      </p:pic>
+      <p:sp>
+        <p:nvSpPr>
+          <p:cNvPr id="14" name="Text 9"/>
+          <p:cNvSpPr txBox="1"/>
+          <p:nvPr/>
+        </p:nvSpPr>
+        <p:spPr>
+          <a:xfrm>
+            <a:off x="1143000" y="3054096"/>
+            <a:ext cx="7498080" cy="274320"/>
+          </a:xfrm>
+          <a:prstGeom prst="rect">
+            <a:avLst/>
+          </a:prstGeom>
+          <a:noFill/>
+          <a:ln/>
+        </p:spPr>
+        <p:txBody>
+          <a:bodyPr wrap="square" lIns="0" tIns="0" rIns="0" bIns="0" rtlCol="0" anchor="t"/>
+          <a:lstStyle/>
+          <a:p>
+            <a:pPr indent="0" marL="0">
+              <a:buNone/>
+            </a:pPr>
+            <a:r>
+              <a:rPr lang="en-US" sz="1400" b="1" dirty="0">
+                <a:solidFill>
+                  <a:srgbClr val="0F3D3E"/>
+                </a:solidFill>
+                <a:latin typeface="Calibri" pitchFamily="34" charset="0"/>
+                <a:ea typeface="Calibri" pitchFamily="34" charset="-122"/>
+                <a:cs typeface="Calibri" pitchFamily="34" charset="-120"/>
+              </a:rPr>
+              <a:t>Safety by separation</a:t>
+            </a:r>
+            <a:endParaRPr lang="en-US" sz="1400" dirty="0"/>
+          </a:p>
+        </p:txBody>
+      </p:sp>
+      <p:sp>
+        <p:nvSpPr>
+          <p:cNvPr id="15" name="Text 10"/>
+          <p:cNvSpPr txBox="1"/>
+          <p:nvPr/>
+        </p:nvSpPr>
+        <p:spPr>
+          <a:xfrm>
+            <a:off x="1143000" y="3328416"/>
+            <a:ext cx="7498080" cy="548640"/>
+          </a:xfrm>
+          <a:prstGeom prst="rect">
+            <a:avLst/>
+          </a:prstGeom>
+          <a:noFill/>
+          <a:ln/>
+        </p:spPr>
+        <p:txBody>
+          <a:bodyPr wrap="square" lIns="0" tIns="0" rIns="0" bIns="0" rtlCol="0" anchor="t"/>
+          <a:lstStyle/>
+          <a:p>
+            <a:pPr indent="0" marL="0">
+              <a:buNone/>
+            </a:pPr>
+            <a:r>
+              <a:rPr lang="en-US" sz="1050" dirty="0">
+                <a:solidFill>
+                  <a:srgbClr val="1B2424"/>
+                </a:solidFill>
+                <a:latin typeface="Calibri" pitchFamily="34" charset="0"/>
+                <a:ea typeface="Calibri" pitchFamily="34" charset="-122"/>
+                <a:cs typeface="Calibri" pitchFamily="34" charset="-120"/>
+              </a:rPr>
+              <a:t>The AI reads, explains and translates. Every legal decision comes from a deterministic, versioned, unit-tested rule engine, so an institution can audit it.</a:t>
+            </a:r>
+            <a:endParaRPr lang="en-US" sz="1050" dirty="0"/>
+          </a:p>
+        </p:txBody>
+      </p:sp>
+      <p:sp>
+        <p:nvSpPr>
+          <p:cNvPr id="16" name="Shape 11"/>
+          <p:cNvSpPr/>
+          <p:nvPr/>
+        </p:nvSpPr>
+        <p:spPr>
+          <a:xfrm>
+            <a:off x="457200" y="3922776"/>
+            <a:ext cx="502920" cy="502920"/>
+          </a:xfrm>
+          <a:prstGeom prst="ellipse">
+            <a:avLst/>
+          </a:prstGeom>
+          <a:solidFill>
+            <a:srgbClr val="0F3D3E"/>
+          </a:solidFill>
+          <a:ln w="12700">
+            <a:solidFill>
+              <a:srgbClr val="0F3D3E"/>
+            </a:solidFill>
+            <a:prstDash val="solid"/>
+          </a:ln>
+        </p:spPr>
+      </p:sp>
+      <p:pic>
+        <p:nvPicPr>
+          <p:cNvPr id="17" name="Image 3" descr="preencoded.png">    </p:cNvPr>
+          <p:cNvPicPr>
+            <a:picLocks noChangeAspect="1"/>
+          </p:cNvPicPr>
+          <p:nvPr/>
+        </p:nvPicPr>
+        <p:blipFill>
+          <a:blip r:embed="rId4"/>
+          <a:stretch>
+            <a:fillRect/>
+          </a:stretch>
+        </p:blipFill>
+        <p:spPr>
+          <a:xfrm>
+            <a:off x="587959" y="4053535"/>
+            <a:ext cx="241402" cy="241402"/>
+          </a:xfrm>
+          <a:prstGeom prst="rect">
+            <a:avLst/>
+          </a:prstGeom>
+        </p:spPr>
+      </p:pic>
+      <p:sp>
+        <p:nvSpPr>
+          <p:cNvPr id="18" name="Text 12"/>
+          <p:cNvSpPr txBox="1"/>
+          <p:nvPr/>
+        </p:nvSpPr>
+        <p:spPr>
+          <a:xfrm>
+            <a:off x="1143000" y="3904488"/>
+            <a:ext cx="7498080" cy="274320"/>
+          </a:xfrm>
+          <a:prstGeom prst="rect">
+            <a:avLst/>
+          </a:prstGeom>
+          <a:noFill/>
+          <a:ln/>
+        </p:spPr>
+        <p:txBody>
+          <a:bodyPr wrap="square" lIns="0" tIns="0" rIns="0" bIns="0" rtlCol="0" anchor="t"/>
+          <a:lstStyle/>
+          <a:p>
+            <a:pPr indent="0" marL="0">
+              <a:buNone/>
+            </a:pPr>
+            <a:r>
+              <a:rPr lang="en-US" sz="1400" b="1" dirty="0">
+                <a:solidFill>
+                  <a:srgbClr val="0F3D3E"/>
+                </a:solidFill>
+                <a:latin typeface="Calibri" pitchFamily="34" charset="0"/>
+                <a:ea typeface="Calibri" pitchFamily="34" charset="-122"/>
+                <a:cs typeface="Calibri" pitchFamily="34" charset="-120"/>
+              </a:rPr>
+              <a:t>Bring your own data, key and rules</a:t>
+            </a:r>
+            <a:endParaRPr lang="en-US" sz="1400" dirty="0"/>
+          </a:p>
+        </p:txBody>
+      </p:sp>
+      <p:sp>
+        <p:nvSpPr>
+          <p:cNvPr id="19" name="Text 13"/>
+          <p:cNvSpPr txBox="1"/>
+          <p:nvPr/>
+        </p:nvSpPr>
+        <p:spPr>
+          <a:xfrm>
+            <a:off x="1143000" y="4178808"/>
+            <a:ext cx="7498080" cy="548640"/>
+          </a:xfrm>
+          <a:prstGeom prst="rect">
+            <a:avLst/>
+          </a:prstGeom>
+          <a:noFill/>
+          <a:ln/>
+        </p:spPr>
+        <p:txBody>
+          <a:bodyPr wrap="square" lIns="0" tIns="0" rIns="0" bIns="0" rtlCol="0" anchor="t"/>
+          <a:lstStyle/>
+          <a:p>
+            <a:pPr indent="0" marL="0">
+              <a:buNone/>
+            </a:pPr>
+            <a:r>
+              <a:rPr lang="en-US" sz="1050" dirty="0">
+                <a:solidFill>
+                  <a:srgbClr val="1B2424"/>
+                </a:solidFill>
+                <a:latin typeface="Calibri" pitchFamily="34" charset="0"/>
+                <a:ea typeface="Calibri" pitchFamily="34" charset="-122"/>
+                <a:cs typeface="Calibri" pitchFamily="34" charset="-120"/>
+              </a:rPr>
+              <a:t>A bank sends its own claim rules as JSON. Virasat applies them and records the rule version on every claim.</a:t>
+            </a:r>
+            <a:endParaRPr lang="en-US" sz="1050" dirty="0"/>
+          </a:p>
+        </p:txBody>
+      </p:sp>
+    </p:spTree>
+  </p:cSld>
+  <p:clrMapOvr>
+    <a:masterClrMapping/>
+  </p:clrMapOvr>
+</p:sld>
+</file>
+
+<file path=ppt/slides/slide5.xml><?xml version="1.0" encoding="utf-8"?>
+<p:sld xmlns:a="http://schemas.openxmlformats.org/drawingml/2006/main" xmlns:r="http://schemas.openxmlformats.org/officeDocument/2006/relationships" xmlns:p="http://schemas.openxmlformats.org/presentationml/2006/main">
+  <p:cSld name="Slide 5">
+    <p:bg>
+      <p:bgPr>
+        <a:solidFill>
+          <a:srgbClr val="E6F0EE"/>
+        </a:solidFill>
+      </p:bgPr>
+    </p:bg>
+    <p:spTree>
+      <p:nvGrpSpPr>
+        <p:cNvPr id="1" name=""/>
+        <p:cNvGrpSpPr/>
+        <p:nvPr/>
+      </p:nvGrpSpPr>
+      <p:grpSpPr>
+        <a:xfrm>
+          <a:off x="0" y="0"/>
+          <a:ext cx="0" cy="0"/>
+          <a:chOff x="0" y="0"/>
+          <a:chExt cx="0" cy="0"/>
+        </a:xfrm>
+      </p:grpSpPr>
+      <p:sp>
+        <p:nvSpPr>
+          <p:cNvPr id="2" name="Text 0"/>
+          <p:cNvSpPr txBox="1"/>
+          <p:nvPr/>
+        </p:nvSpPr>
+        <p:spPr>
+          <a:xfrm>
+            <a:off x="457200" y="256032"/>
+            <a:ext cx="7315200" cy="274320"/>
+          </a:xfrm>
+          <a:prstGeom prst="rect">
+            <a:avLst/>
+          </a:prstGeom>
+          <a:noFill/>
+          <a:ln/>
+        </p:spPr>
+        <p:txBody>
+          <a:bodyPr wrap="square" lIns="0" tIns="0" rIns="0" bIns="0" rtlCol="0" anchor="ctr"/>
+          <a:lstStyle/>
+          <a:p>
+            <a:pPr indent="0" marL="0">
+              <a:buNone/>
+            </a:pPr>
+            <a:r>
+              <a:rPr lang="en-US" sz="1100" b="1" spc="200" kern="0" dirty="0">
+                <a:solidFill>
+                  <a:srgbClr val="E3A33B"/>
+                </a:solidFill>
+                <a:latin typeface="Calibri" pitchFamily="34" charset="0"/>
+                <a:ea typeface="Calibri" pitchFamily="34" charset="-122"/>
+                <a:cs typeface="Calibri" pitchFamily="34" charset="-120"/>
+              </a:rPr>
+              <a:t>03  ·  INNOVATION: THE TWO AI DEBATE</a:t>
+            </a:r>
+            <a:endParaRPr lang="en-US" sz="1100" dirty="0"/>
+          </a:p>
+        </p:txBody>
+      </p:sp>
+      <p:sp>
+        <p:nvSpPr>
+          <p:cNvPr id="3" name="Text 1"/>
+          <p:cNvSpPr txBox="1"/>
+          <p:nvPr/>
+        </p:nvSpPr>
+        <p:spPr>
+          <a:xfrm>
+            <a:off x="457200" y="530352"/>
+            <a:ext cx="8229600" cy="731520"/>
+          </a:xfrm>
+          <a:prstGeom prst="rect">
+            <a:avLst/>
+          </a:prstGeom>
+          <a:noFill/>
+          <a:ln/>
+        </p:spPr>
+        <p:txBody>
+          <a:bodyPr wrap="square" lIns="0" tIns="0" rIns="0" bIns="0" rtlCol="0" anchor="t"/>
+          <a:lstStyle/>
+          <a:p>
+            <a:pPr indent="0" marL="0">
+              <a:buNone/>
+            </a:pPr>
+            <a:r>
+              <a:rPr lang="en-US" sz="2400" b="1" dirty="0">
+                <a:solidFill>
+                  <a:srgbClr val="1B2424"/>
+                </a:solidFill>
+                <a:latin typeface="Cambria" pitchFamily="34" charset="0"/>
+                <a:ea typeface="Cambria" pitchFamily="34" charset="-122"/>
+                <a:cs typeface="Cambria" pitchFamily="34" charset="-120"/>
+              </a:rPr>
+              <a:t>The Challenger caught what a single answer missed</a:t>
+            </a:r>
+            <a:endParaRPr lang="en-US" sz="2400" dirty="0"/>
+          </a:p>
+        </p:txBody>
+      </p:sp>
+      <p:sp>
+        <p:nvSpPr>
+          <p:cNvPr id="4" name="Shape 2"/>
+          <p:cNvSpPr/>
+          <p:nvPr/>
+        </p:nvSpPr>
+        <p:spPr>
+          <a:xfrm>
+            <a:off x="457200" y="1371600"/>
+            <a:ext cx="4114800" cy="1371600"/>
           </a:xfrm>
           <a:prstGeom prst="roundRect">
             <a:avLst>
-              <a:gd name="adj" fmla="val 1887"/>
+              <a:gd name="adj" fmla="val 5333"/>
             </a:avLst>
           </a:prstGeom>
           <a:solidFill>
-            <a:srgbClr val="EDF2F1"/>
+            <a:srgbClr val="FFFFFF"/>
           </a:solidFill>
           <a:ln w="9525">
             <a:solidFill>
@@ -7472,48 +8090,102 @@
           </a:effectLst>
         </p:spPr>
       </p:sp>
-      <p:pic>
-        <p:nvPicPr>
-          <p:cNvPr id="5" name="Image 0" descr="preencoded.png">    </p:cNvPr>
-          <p:cNvPicPr>
-            <a:picLocks noChangeAspect="1"/>
-          </p:cNvPicPr>
-          <p:nvPr/>
-        </p:nvPicPr>
-        <p:blipFill>
-          <a:blip r:embed="rId1"/>
-          <a:stretch>
-            <a:fillRect/>
-          </a:stretch>
-        </p:blipFill>
-        <p:spPr>
-          <a:xfrm>
-            <a:off x="457200" y="1325880"/>
-            <a:ext cx="4023360" cy="2834640"/>
-          </a:xfrm>
-          <a:prstGeom prst="rect">
-            <a:avLst/>
-          </a:prstGeom>
-        </p:spPr>
-      </p:pic>
-      <p:sp>
-        <p:nvSpPr>
-          <p:cNvPr id="6" name="Shape 3"/>
+      <p:sp>
+        <p:nvSpPr>
+          <p:cNvPr id="5" name="Text 3"/>
+          <p:cNvSpPr txBox="1"/>
+          <p:nvPr/>
+        </p:nvSpPr>
+        <p:spPr>
+          <a:xfrm>
+            <a:off x="640080" y="1481328"/>
+            <a:ext cx="3657600" cy="228600"/>
+          </a:xfrm>
+          <a:prstGeom prst="rect">
+            <a:avLst/>
+          </a:prstGeom>
+          <a:noFill/>
+          <a:ln/>
+        </p:spPr>
+        <p:txBody>
+          <a:bodyPr wrap="square" lIns="0" tIns="0" rIns="0" bIns="0" rtlCol="0" anchor="t"/>
+          <a:lstStyle/>
+          <a:p>
+            <a:pPr indent="0" marL="0">
+              <a:buNone/>
+            </a:pPr>
+            <a:r>
+              <a:rPr lang="en-US" sz="1100" b="1" dirty="0">
+                <a:solidFill>
+                  <a:srgbClr val="1E7F4F"/>
+                </a:solidFill>
+                <a:latin typeface="Calibri" pitchFamily="34" charset="0"/>
+                <a:ea typeface="Calibri" pitchFamily="34" charset="-122"/>
+                <a:cs typeface="Calibri" pitchFamily="34" charset="-120"/>
+              </a:rPr>
+              <a:t>Supporter</a:t>
+            </a:r>
+            <a:endParaRPr lang="en-US" sz="1100" dirty="0"/>
+          </a:p>
+        </p:txBody>
+      </p:sp>
+      <p:sp>
+        <p:nvSpPr>
+          <p:cNvPr id="6" name="Text 4"/>
+          <p:cNvSpPr txBox="1"/>
+          <p:nvPr/>
+        </p:nvSpPr>
+        <p:spPr>
+          <a:xfrm>
+            <a:off x="640080" y="1737360"/>
+            <a:ext cx="3749040" cy="914400"/>
+          </a:xfrm>
+          <a:prstGeom prst="rect">
+            <a:avLst/>
+          </a:prstGeom>
+          <a:noFill/>
+          <a:ln/>
+        </p:spPr>
+        <p:txBody>
+          <a:bodyPr wrap="square" lIns="0" tIns="0" rIns="0" bIns="0" rtlCol="0" anchor="t"/>
+          <a:lstStyle/>
+          <a:p>
+            <a:pPr indent="0" marL="0">
+              <a:buNone/>
+            </a:pPr>
+            <a:r>
+              <a:rPr lang="en-US" sz="1050" dirty="0">
+                <a:solidFill>
+                  <a:srgbClr val="1B2424"/>
+                </a:solidFill>
+                <a:latin typeface="Calibri" pitchFamily="34" charset="0"/>
+                <a:ea typeface="Calibri" pitchFamily="34" charset="-122"/>
+                <a:cs typeface="Calibri" pitchFamily="34" charset="-120"/>
+              </a:rPr>
+              <a:t>The nominee route is correct: the passbook names a nominee and the amount is below the bank's threshold.</a:t>
+            </a:r>
+            <a:endParaRPr lang="en-US" sz="1050" dirty="0"/>
+          </a:p>
+        </p:txBody>
+      </p:sp>
+      <p:sp>
+        <p:nvSpPr>
+          <p:cNvPr id="7" name="Shape 5"/>
           <p:cNvSpPr/>
           <p:nvPr/>
         </p:nvSpPr>
         <p:spPr>
           <a:xfrm>
-            <a:off x="4626864" y="1289304"/>
-            <a:ext cx="4096512" cy="2907792"/>
+            <a:off x="4663440" y="1371600"/>
+            <a:ext cx="4023360" cy="1371600"/>
           </a:xfrm>
           <a:prstGeom prst="roundRect">
             <a:avLst>
-              <a:gd name="adj" fmla="val 1887"/>
+              <a:gd name="adj" fmla="val 5333"/>
             </a:avLst>
           </a:prstGeom>
           <a:solidFill>
-            <a:srgbClr val="EDF2F1"/>
+            <a:srgbClr val="FFFFFF"/>
           </a:solidFill>
           <a:ln w="9525">
             <a:solidFill>
@@ -7530,56 +8202,222 @@
           </a:effectLst>
         </p:spPr>
       </p:sp>
-      <p:pic>
-        <p:nvPicPr>
-          <p:cNvPr id="7" name="Image 1" descr="preencoded.png">    </p:cNvPr>
-          <p:cNvPicPr>
-            <a:picLocks noChangeAspect="1"/>
-          </p:cNvPicPr>
-          <p:nvPr/>
-        </p:nvPicPr>
-        <p:blipFill>
-          <a:blip r:embed="rId2"/>
-          <a:stretch>
-            <a:fillRect/>
-          </a:stretch>
-        </p:blipFill>
-        <p:spPr>
-          <a:xfrm>
-            <a:off x="4663440" y="1325880"/>
-            <a:ext cx="4023360" cy="2834640"/>
-          </a:xfrm>
-          <a:prstGeom prst="rect">
-            <a:avLst/>
-          </a:prstGeom>
-        </p:spPr>
-      </p:pic>
-      <p:sp>
-        <p:nvSpPr>
-          <p:cNvPr id="8" name="Text 4"/>
-          <p:cNvSpPr txBox="1"/>
-          <p:nvPr/>
-        </p:nvSpPr>
-        <p:spPr>
-          <a:xfrm>
-            <a:off x="457200" y="4224528"/>
-            <a:ext cx="4023360" cy="548640"/>
-          </a:xfrm>
-          <a:prstGeom prst="rect">
-            <a:avLst/>
-          </a:prstGeom>
-          <a:noFill/>
-          <a:ln/>
-        </p:spPr>
-        <p:txBody>
-          <a:bodyPr wrap="square" lIns="0" tIns="0" rIns="0" bIns="0" rtlCol="0" anchor="t"/>
-          <a:lstStyle/>
-          <a:p>
-            <a:pPr indent="0" marL="0">
-              <a:buNone/>
-            </a:pPr>
-            <a:r>
-              <a:rPr lang="en-US" sz="1000" dirty="0">
+      <p:sp>
+        <p:nvSpPr>
+          <p:cNvPr id="8" name="Text 6"/>
+          <p:cNvSpPr txBox="1"/>
+          <p:nvPr/>
+        </p:nvSpPr>
+        <p:spPr>
+          <a:xfrm>
+            <a:off x="4846320" y="1481328"/>
+            <a:ext cx="3657600" cy="228600"/>
+          </a:xfrm>
+          <a:prstGeom prst="rect">
+            <a:avLst/>
+          </a:prstGeom>
+          <a:noFill/>
+          <a:ln/>
+        </p:spPr>
+        <p:txBody>
+          <a:bodyPr wrap="square" lIns="0" tIns="0" rIns="0" bIns="0" rtlCol="0" anchor="t"/>
+          <a:lstStyle/>
+          <a:p>
+            <a:pPr indent="0" marL="0">
+              <a:buNone/>
+            </a:pPr>
+            <a:r>
+              <a:rPr lang="en-US" sz="1100" b="1" dirty="0">
+                <a:solidFill>
+                  <a:srgbClr val="8A5A00"/>
+                </a:solidFill>
+                <a:latin typeface="Calibri" pitchFamily="34" charset="0"/>
+                <a:ea typeface="Calibri" pitchFamily="34" charset="-122"/>
+                <a:cs typeface="Calibri" pitchFamily="34" charset="-120"/>
+              </a:rPr>
+              <a:t>Challenger</a:t>
+            </a:r>
+            <a:endParaRPr lang="en-US" sz="1100" dirty="0"/>
+          </a:p>
+        </p:txBody>
+      </p:sp>
+      <p:sp>
+        <p:nvSpPr>
+          <p:cNvPr id="9" name="Text 7"/>
+          <p:cNvSpPr txBox="1"/>
+          <p:nvPr/>
+        </p:nvSpPr>
+        <p:spPr>
+          <a:xfrm>
+            <a:off x="4846320" y="1737360"/>
+            <a:ext cx="3657600" cy="914400"/>
+          </a:xfrm>
+          <a:prstGeom prst="rect">
+            <a:avLst/>
+          </a:prstGeom>
+          <a:noFill/>
+          <a:ln/>
+        </p:spPr>
+        <p:txBody>
+          <a:bodyPr wrap="square" lIns="0" tIns="0" rIns="0" bIns="0" rtlCol="0" anchor="t"/>
+          <a:lstStyle/>
+          <a:p>
+            <a:pPr indent="0" marL="0">
+              <a:buNone/>
+            </a:pPr>
+            <a:r>
+              <a:rPr lang="en-US" sz="1050" dirty="0">
+                <a:solidFill>
+                  <a:srgbClr val="1B2424"/>
+                </a:solidFill>
+                <a:latin typeface="Calibri" pitchFamily="34" charset="0"/>
+                <a:ea typeface="Calibri" pitchFamily="34" charset="-122"/>
+                <a:cs typeface="Calibri" pitchFamily="34" charset="-120"/>
+              </a:rPr>
+              <a:t>The passbook says 'Sunita R Kulkarni'. Her ID may say 'Sunita Ramesh Kulkarni'. Banks reject claims on a spelling mismatch.</a:t>
+            </a:r>
+            <a:endParaRPr lang="en-US" sz="1050" dirty="0"/>
+          </a:p>
+        </p:txBody>
+      </p:sp>
+      <p:sp>
+        <p:nvSpPr>
+          <p:cNvPr id="10" name="Shape 8"/>
+          <p:cNvSpPr/>
+          <p:nvPr/>
+        </p:nvSpPr>
+        <p:spPr>
+          <a:xfrm>
+            <a:off x="457200" y="2880360"/>
+            <a:ext cx="8229600" cy="1234440"/>
+          </a:xfrm>
+          <a:prstGeom prst="roundRect">
+            <a:avLst>
+              <a:gd name="adj" fmla="val 5926"/>
+            </a:avLst>
+          </a:prstGeom>
+          <a:solidFill>
+            <a:srgbClr val="0F3D3E"/>
+          </a:solidFill>
+          <a:ln w="9525">
+            <a:solidFill>
+              <a:srgbClr val="0F3D3E"/>
+            </a:solidFill>
+            <a:prstDash val="solid"/>
+          </a:ln>
+          <a:effectLst>
+            <a:outerShdw sx="100000" sy="100000" kx="0" ky="0" algn="bl" rotWithShape="0" blurRad="101600" dist="25400" dir="5400000">
+              <a:srgbClr val="000000">
+                <a:alpha val="12000"/>
+              </a:srgbClr>
+            </a:outerShdw>
+          </a:effectLst>
+        </p:spPr>
+      </p:sp>
+      <p:sp>
+        <p:nvSpPr>
+          <p:cNvPr id="11" name="Text 9"/>
+          <p:cNvSpPr txBox="1"/>
+          <p:nvPr/>
+        </p:nvSpPr>
+        <p:spPr>
+          <a:xfrm>
+            <a:off x="685800" y="2999232"/>
+            <a:ext cx="2743200" cy="228600"/>
+          </a:xfrm>
+          <a:prstGeom prst="rect">
+            <a:avLst/>
+          </a:prstGeom>
+          <a:noFill/>
+          <a:ln/>
+        </p:spPr>
+        <p:txBody>
+          <a:bodyPr wrap="square" lIns="0" tIns="0" rIns="0" bIns="0" rtlCol="0" anchor="t"/>
+          <a:lstStyle/>
+          <a:p>
+            <a:pPr indent="0" marL="0">
+              <a:buNone/>
+            </a:pPr>
+            <a:r>
+              <a:rPr lang="en-US" sz="1100" b="1" dirty="0">
+                <a:solidFill>
+                  <a:srgbClr val="E3A33B"/>
+                </a:solidFill>
+                <a:latin typeface="Calibri" pitchFamily="34" charset="0"/>
+                <a:ea typeface="Calibri" pitchFamily="34" charset="-122"/>
+                <a:cs typeface="Calibri" pitchFamily="34" charset="-120"/>
+              </a:rPr>
+              <a:t>Referee</a:t>
+            </a:r>
+            <a:endParaRPr lang="en-US" sz="1100" dirty="0"/>
+          </a:p>
+        </p:txBody>
+      </p:sp>
+      <p:sp>
+        <p:nvSpPr>
+          <p:cNvPr id="12" name="Text 10"/>
+          <p:cNvSpPr txBox="1"/>
+          <p:nvPr/>
+        </p:nvSpPr>
+        <p:spPr>
+          <a:xfrm>
+            <a:off x="685800" y="3255264"/>
+            <a:ext cx="7772400" cy="731520"/>
+          </a:xfrm>
+          <a:prstGeom prst="rect">
+            <a:avLst/>
+          </a:prstGeom>
+          <a:noFill/>
+          <a:ln/>
+        </p:spPr>
+        <p:txBody>
+          <a:bodyPr wrap="square" lIns="0" tIns="0" rIns="0" bIns="0" rtlCol="0" anchor="t"/>
+          <a:lstStyle/>
+          <a:p>
+            <a:pPr indent="0" marL="0">
+              <a:buNone/>
+            </a:pPr>
+            <a:r>
+              <a:rPr lang="en-US" sz="1300" dirty="0">
+                <a:solidFill>
+                  <a:srgbClr val="FFFFFF"/>
+                </a:solidFill>
+                <a:latin typeface="Calibri" pitchFamily="34" charset="0"/>
+                <a:ea typeface="Calibri" pitchFamily="34" charset="-122"/>
+                <a:cs typeface="Calibri" pitchFamily="34" charset="-120"/>
+              </a:rPr>
+              <a:t>Nominee route. High confidence. Next step: carry an ID that matches the nominee name exactly, or an affidavit for the name variation.</a:t>
+            </a:r>
+            <a:endParaRPr lang="en-US" sz="1300" dirty="0"/>
+          </a:p>
+        </p:txBody>
+      </p:sp>
+      <p:sp>
+        <p:nvSpPr>
+          <p:cNvPr id="13" name="Text 11"/>
+          <p:cNvSpPr txBox="1"/>
+          <p:nvPr/>
+        </p:nvSpPr>
+        <p:spPr>
+          <a:xfrm>
+            <a:off x="457200" y="4828032"/>
+            <a:ext cx="8229600" cy="228600"/>
+          </a:xfrm>
+          <a:prstGeom prst="rect">
+            <a:avLst/>
+          </a:prstGeom>
+          <a:noFill/>
+          <a:ln/>
+        </p:spPr>
+        <p:txBody>
+          <a:bodyPr wrap="square" lIns="0" tIns="0" rIns="0" bIns="0" rtlCol="0" anchor="ctr"/>
+          <a:lstStyle/>
+          <a:p>
+            <a:pPr indent="0" marL="0">
+              <a:buNone/>
+            </a:pPr>
+            <a:r>
+              <a:rPr lang="en-US" sz="800" dirty="0">
                 <a:solidFill>
                   <a:srgbClr val="5B6B6A"/>
                 </a:solidFill>
@@ -7587,48 +8425,9 @@
                 <a:ea typeface="Calibri" pitchFamily="34" charset="-122"/>
                 <a:cs typeface="Calibri" pitchFamily="34" charset="-120"/>
               </a:rPr>
-              <a:t>Find: three sample papers and the tax statement become a list of ₹4.85 lakh waiting in 5 places, each with its own portal and guided steps.</a:t>
-            </a:r>
-            <a:endParaRPr lang="en-US" sz="1000" dirty="0"/>
-          </a:p>
-        </p:txBody>
-      </p:sp>
-      <p:sp>
-        <p:nvSpPr>
-          <p:cNvPr id="9" name="Text 5"/>
-          <p:cNvSpPr txBox="1"/>
-          <p:nvPr/>
-        </p:nvSpPr>
-        <p:spPr>
-          <a:xfrm>
-            <a:off x="4663440" y="4224528"/>
-            <a:ext cx="4023360" cy="548640"/>
-          </a:xfrm>
-          <a:prstGeom prst="rect">
-            <a:avLst/>
-          </a:prstGeom>
-          <a:noFill/>
-          <a:ln/>
-        </p:spPr>
-        <p:txBody>
-          <a:bodyPr wrap="square" lIns="0" tIns="0" rIns="0" bIns="0" rtlCol="0" anchor="t"/>
-          <a:lstStyle/>
-          <a:p>
-            <a:pPr indent="0" marL="0">
-              <a:buNone/>
-            </a:pPr>
-            <a:r>
-              <a:rPr lang="en-US" sz="1000" dirty="0">
-                <a:solidFill>
-                  <a:srgbClr val="5B6B6A"/>
-                </a:solidFill>
-                <a:latin typeface="Calibri" pitchFamily="34" charset="0"/>
-                <a:ea typeface="Calibri" pitchFamily="34" charset="-122"/>
-                <a:cs typeface="Calibri" pitchFamily="34" charset="-120"/>
-              </a:rPr>
-              <a:t>Claim: the rule engine picks the route, the Two AI Debate checks it, and the filled claim pack downloads as a PDF.</a:t>
-            </a:r>
-            <a:endParaRPr lang="en-US" sz="1000" dirty="0"/>
+              <a:t>Research: multi-agent debate improves factual accuracy (Du and others, ICML 2024). Newer work warns it is not always better, so we measure it: npm run eval reports how often the Challenger catches a planted problem, with and without the debate. Both numbers are published on the site.</a:t>
+            </a:r>
+            <a:endParaRPr lang="en-US" sz="800" dirty="0"/>
           </a:p>
         </p:txBody>
       </p:sp>
@@ -7640,9 +8439,9 @@
 </p:sld>
 </file>
 
-<file path=ppt/slides/slide5.xml><?xml version="1.0" encoding="utf-8"?>
+<file path=ppt/slides/slide6.xml><?xml version="1.0" encoding="utf-8"?>
 <p:sld xmlns:a="http://schemas.openxmlformats.org/drawingml/2006/main" xmlns:r="http://schemas.openxmlformats.org/officeDocument/2006/relationships" xmlns:p="http://schemas.openxmlformats.org/presentationml/2006/main">
-  <p:cSld name="Slide 5">
+  <p:cSld name="Slide 6">
     <p:bg>
       <p:bgPr>
         <a:solidFill>
@@ -7697,7 +8496,7 @@
                 <a:ea typeface="Calibri" pitchFamily="34" charset="-122"/>
                 <a:cs typeface="Calibri" pitchFamily="34" charset="-120"/>
               </a:rPr>
-              <a:t>03  ·  INNOVATION</a:t>
+              <a:t>04  ·  TECHNICAL IMPLEMENTATION</a:t>
             </a:r>
             <a:endParaRPr lang="en-US" sz="1100" dirty="0"/>
           </a:p>
@@ -7736,7 +8535,7 @@
                 <a:ea typeface="Cambria" pitchFamily="34" charset="-122"/>
                 <a:cs typeface="Cambria" pitchFamily="34" charset="-120"/>
               </a:rPr>
-              <a:t>Four things that exist nowhere else</a:t>
+              <a:t>What is actually built</a:t>
             </a:r>
             <a:endParaRPr lang="en-US" sz="2600" dirty="0"/>
           </a:p>
@@ -7751,119 +8550,244 @@
         <p:spPr>
           <a:xfrm>
             <a:off x="457200" y="1371600"/>
-            <a:ext cx="502920" cy="502920"/>
-          </a:xfrm>
-          <a:prstGeom prst="ellipse">
-            <a:avLst/>
+            <a:ext cx="2743200" cy="2240280"/>
+          </a:xfrm>
+          <a:prstGeom prst="roundRect">
+            <a:avLst>
+              <a:gd name="adj" fmla="val 3265"/>
+            </a:avLst>
+          </a:prstGeom>
+          <a:solidFill>
+            <a:srgbClr val="FFFFFF"/>
+          </a:solidFill>
+          <a:ln w="9525">
+            <a:solidFill>
+              <a:srgbClr val="D5E2DF"/>
+            </a:solidFill>
+            <a:prstDash val="solid"/>
+          </a:ln>
+          <a:effectLst>
+            <a:outerShdw sx="100000" sy="100000" kx="0" ky="0" algn="bl" rotWithShape="0" blurRad="101600" dist="25400" dir="5400000">
+              <a:srgbClr val="000000">
+                <a:alpha val="12000"/>
+              </a:srgbClr>
+            </a:outerShdw>
+          </a:effectLst>
+        </p:spPr>
+      </p:sp>
+      <p:sp>
+        <p:nvSpPr>
+          <p:cNvPr id="5" name="Text 3"/>
+          <p:cNvSpPr txBox="1"/>
+          <p:nvPr/>
+        </p:nvSpPr>
+        <p:spPr>
+          <a:xfrm>
+            <a:off x="640080" y="1481328"/>
+            <a:ext cx="2377440" cy="274320"/>
+          </a:xfrm>
+          <a:prstGeom prst="rect">
+            <a:avLst/>
+          </a:prstGeom>
+          <a:noFill/>
+          <a:ln/>
+        </p:spPr>
+        <p:txBody>
+          <a:bodyPr wrap="square" lIns="0" tIns="0" rIns="0" bIns="0" rtlCol="0" anchor="t"/>
+          <a:lstStyle/>
+          <a:p>
+            <a:pPr indent="0" marL="0">
+              <a:buNone/>
+            </a:pPr>
+            <a:r>
+              <a:rPr lang="en-US" sz="1050" b="1" spc="150" kern="0" dirty="0">
+                <a:solidFill>
+                  <a:srgbClr val="5B6B6A"/>
+                </a:solidFill>
+                <a:latin typeface="Calibri" pitchFamily="34" charset="0"/>
+                <a:ea typeface="Calibri" pitchFamily="34" charset="-122"/>
+                <a:cs typeface="Calibri" pitchFamily="34" charset="-120"/>
+              </a:rPr>
+              <a:t>READS AND WRITES</a:t>
+            </a:r>
+            <a:endParaRPr lang="en-US" sz="1050" dirty="0"/>
+          </a:p>
+        </p:txBody>
+      </p:sp>
+      <p:sp>
+        <p:nvSpPr>
+          <p:cNvPr id="6" name="Text 4"/>
+          <p:cNvSpPr txBox="1"/>
+          <p:nvPr/>
+        </p:nvSpPr>
+        <p:spPr>
+          <a:xfrm>
+            <a:off x="640080" y="1783080"/>
+            <a:ext cx="2377440" cy="1737360"/>
+          </a:xfrm>
+          <a:prstGeom prst="rect">
+            <a:avLst/>
+          </a:prstGeom>
+          <a:noFill/>
+          <a:ln/>
+        </p:spPr>
+        <p:txBody>
+          <a:bodyPr wrap="square" lIns="0" tIns="0" rIns="0" bIns="0" rtlCol="0" anchor="t"/>
+          <a:lstStyle/>
+          <a:p>
+            <a:pPr marL="342900" indent="-342900">
+              <a:spcAft>
+                <a:spcPts val="300"/>
+              </a:spcAft>
+              <a:buSzPct val="100000"/>
+              <a:buChar char="•"/>
+            </a:pPr>
+            <a:r>
+              <a:rPr lang="en-US" sz="1000" dirty="0">
+                <a:solidFill>
+                  <a:srgbClr val="1B2424"/>
+                </a:solidFill>
+                <a:latin typeface="Calibri" pitchFamily="34" charset="0"/>
+                <a:ea typeface="Calibri" pitchFamily="34" charset="-122"/>
+                <a:cs typeface="Calibri" pitchFamily="34" charset="-120"/>
+              </a:rPr>
+              <a:t>Claude Opus 5 with JSON schema outputs</a:t>
+            </a:r>
+            <a:endParaRPr lang="en-US" sz="1000" dirty="0"/>
+          </a:p>
+          <a:p>
+            <a:pPr marL="342900" indent="-342900">
+              <a:spcAft>
+                <a:spcPts val="300"/>
+              </a:spcAft>
+              <a:buSzPct val="100000"/>
+              <a:buChar char="•"/>
+            </a:pPr>
+            <a:r>
+              <a:rPr lang="en-US" sz="1000" dirty="0">
+                <a:solidFill>
+                  <a:srgbClr val="1B2424"/>
+                </a:solidFill>
+                <a:latin typeface="Calibri" pitchFamily="34" charset="0"/>
+                <a:ea typeface="Calibri" pitchFamily="34" charset="-122"/>
+                <a:cs typeface="Calibri" pitchFamily="34" charset="-120"/>
+              </a:rPr>
+              <a:t>AIS PDF tables parsed in code</a:t>
+            </a:r>
+            <a:endParaRPr lang="en-US" sz="1000" dirty="0"/>
+          </a:p>
+          <a:p>
+            <a:pPr marL="342900" indent="-342900">
+              <a:spcAft>
+                <a:spcPts val="300"/>
+              </a:spcAft>
+              <a:buSzPct val="100000"/>
+              <a:buChar char="•"/>
+            </a:pPr>
+            <a:r>
+              <a:rPr lang="en-US" sz="1000" dirty="0">
+                <a:solidFill>
+                  <a:srgbClr val="1B2424"/>
+                </a:solidFill>
+                <a:latin typeface="Calibri" pitchFamily="34" charset="0"/>
+                <a:ea typeface="Calibri" pitchFamily="34" charset="-122"/>
+                <a:cs typeface="Calibri" pitchFamily="34" charset="-120"/>
+              </a:rPr>
+              <a:t>Claim packs built with pdf-lib</a:t>
+            </a:r>
+            <a:endParaRPr lang="en-US" sz="1000" dirty="0"/>
+          </a:p>
+          <a:p>
+            <a:pPr marL="342900" indent="-342900">
+              <a:spcAft>
+                <a:spcPts val="300"/>
+              </a:spcAft>
+              <a:buSzPct val="100000"/>
+              <a:buChar char="•"/>
+            </a:pPr>
+            <a:r>
+              <a:rPr lang="en-US" sz="1000" dirty="0">
+                <a:solidFill>
+                  <a:srgbClr val="1B2424"/>
+                </a:solidFill>
+                <a:latin typeface="Calibri" pitchFamily="34" charset="0"/>
+                <a:ea typeface="Calibri" pitchFamily="34" charset="-122"/>
+                <a:cs typeface="Calibri" pitchFamily="34" charset="-120"/>
+              </a:rPr>
+              <a:t>Browser speech in and out</a:t>
+            </a:r>
+            <a:endParaRPr lang="en-US" sz="1000" dirty="0"/>
+          </a:p>
+        </p:txBody>
+      </p:sp>
+      <p:sp>
+        <p:nvSpPr>
+          <p:cNvPr id="7" name="Shape 5"/>
+          <p:cNvSpPr/>
+          <p:nvPr/>
+        </p:nvSpPr>
+        <p:spPr>
+          <a:xfrm>
+            <a:off x="3337560" y="1371600"/>
+            <a:ext cx="2468880" cy="2240280"/>
+          </a:xfrm>
+          <a:prstGeom prst="roundRect">
+            <a:avLst>
+              <a:gd name="adj" fmla="val 3265"/>
+            </a:avLst>
           </a:prstGeom>
           <a:solidFill>
             <a:srgbClr val="0F3D3E"/>
           </a:solidFill>
-          <a:ln w="12700">
+          <a:ln w="9525">
             <a:solidFill>
               <a:srgbClr val="0F3D3E"/>
             </a:solidFill>
             <a:prstDash val="solid"/>
           </a:ln>
-        </p:spPr>
-      </p:sp>
-      <p:pic>
-        <p:nvPicPr>
-          <p:cNvPr id="5" name="Image 0" descr="preencoded.png">    </p:cNvPr>
-          <p:cNvPicPr>
-            <a:picLocks noChangeAspect="1"/>
-          </p:cNvPicPr>
-          <p:nvPr/>
-        </p:nvPicPr>
-        <p:blipFill>
-          <a:blip r:embed="rId1"/>
-          <a:stretch>
-            <a:fillRect/>
-          </a:stretch>
-        </p:blipFill>
-        <p:spPr>
-          <a:xfrm>
-            <a:off x="587959" y="1502359"/>
-            <a:ext cx="241402" cy="241402"/>
-          </a:xfrm>
-          <a:prstGeom prst="rect">
-            <a:avLst/>
-          </a:prstGeom>
-        </p:spPr>
-      </p:pic>
-      <p:sp>
-        <p:nvSpPr>
-          <p:cNvPr id="6" name="Text 3"/>
-          <p:cNvSpPr txBox="1"/>
-          <p:nvPr/>
-        </p:nvSpPr>
-        <p:spPr>
-          <a:xfrm>
-            <a:off x="1143000" y="1353312"/>
-            <a:ext cx="7498080" cy="274320"/>
-          </a:xfrm>
-          <a:prstGeom prst="rect">
-            <a:avLst/>
-          </a:prstGeom>
-          <a:noFill/>
-          <a:ln/>
-        </p:spPr>
-        <p:txBody>
-          <a:bodyPr wrap="square" lIns="0" tIns="0" rIns="0" bIns="0" rtlCol="0" anchor="t"/>
-          <a:lstStyle/>
-          <a:p>
-            <a:pPr indent="0" marL="0">
-              <a:buNone/>
-            </a:pPr>
-            <a:r>
-              <a:rPr lang="en-US" sz="1400" b="1" dirty="0">
-                <a:solidFill>
-                  <a:srgbClr val="0F3D3E"/>
-                </a:solidFill>
-                <a:latin typeface="Calibri" pitchFamily="34" charset="0"/>
-                <a:ea typeface="Calibri" pitchFamily="34" charset="-122"/>
-                <a:cs typeface="Calibri" pitchFamily="34" charset="-120"/>
-              </a:rPr>
-              <a:t>The tax statement becomes an asset map</a:t>
-            </a:r>
-            <a:endParaRPr lang="en-US" sz="1400" dirty="0"/>
-          </a:p>
-        </p:txBody>
-      </p:sp>
-      <p:sp>
-        <p:nvSpPr>
-          <p:cNvPr id="7" name="Text 4"/>
-          <p:cNvSpPr txBox="1"/>
-          <p:nvPr/>
-        </p:nvSpPr>
-        <p:spPr>
-          <a:xfrm>
-            <a:off x="1143000" y="1627632"/>
-            <a:ext cx="7498080" cy="548640"/>
-          </a:xfrm>
-          <a:prstGeom prst="rect">
-            <a:avLst/>
-          </a:prstGeom>
-          <a:noFill/>
-          <a:ln/>
-        </p:spPr>
-        <p:txBody>
-          <a:bodyPr wrap="square" lIns="0" tIns="0" rIns="0" bIns="0" rtlCol="0" anchor="t"/>
-          <a:lstStyle/>
-          <a:p>
-            <a:pPr indent="0" marL="0">
-              <a:buNone/>
-            </a:pPr>
-            <a:r>
-              <a:rPr lang="en-US" sz="1050" dirty="0">
-                <a:solidFill>
-                  <a:srgbClr val="1B2424"/>
-                </a:solidFill>
-                <a:latin typeface="Calibri" pitchFamily="34" charset="0"/>
-                <a:ea typeface="Calibri" pitchFamily="34" charset="-122"/>
-                <a:cs typeface="Calibri" pitchFamily="34" charset="-120"/>
-              </a:rPr>
-              <a:t>A legal heir can get the account holder's Annual Information Statement. It lists interest from every bank and dividends from every company. Virasat turns that one PDF into a list of places to claim from, even with no papers at all.</a:t>
+          <a:effectLst>
+            <a:outerShdw sx="100000" sy="100000" kx="0" ky="0" algn="bl" rotWithShape="0" blurRad="101600" dist="25400" dir="5400000">
+              <a:srgbClr val="000000">
+                <a:alpha val="12000"/>
+              </a:srgbClr>
+            </a:outerShdw>
+          </a:effectLst>
+        </p:spPr>
+      </p:sp>
+      <p:sp>
+        <p:nvSpPr>
+          <p:cNvPr id="8" name="Text 6"/>
+          <p:cNvSpPr txBox="1"/>
+          <p:nvPr/>
+        </p:nvSpPr>
+        <p:spPr>
+          <a:xfrm>
+            <a:off x="3520440" y="1481328"/>
+            <a:ext cx="2103120" cy="274320"/>
+          </a:xfrm>
+          <a:prstGeom prst="rect">
+            <a:avLst/>
+          </a:prstGeom>
+          <a:noFill/>
+          <a:ln/>
+        </p:spPr>
+        <p:txBody>
+          <a:bodyPr wrap="square" lIns="0" tIns="0" rIns="0" bIns="0" rtlCol="0" anchor="t"/>
+          <a:lstStyle/>
+          <a:p>
+            <a:pPr indent="0" marL="0">
+              <a:buNone/>
+            </a:pPr>
+            <a:r>
+              <a:rPr lang="en-US" sz="1050" b="1" spc="150" kern="0" dirty="0">
+                <a:solidFill>
+                  <a:srgbClr val="E3A33B"/>
+                </a:solidFill>
+                <a:latin typeface="Calibri" pitchFamily="34" charset="0"/>
+                <a:ea typeface="Calibri" pitchFamily="34" charset="-122"/>
+                <a:cs typeface="Calibri" pitchFamily="34" charset="-120"/>
+              </a:rPr>
+              <a:t>DECIDES</a:t>
             </a:r>
             <a:endParaRPr lang="en-US" sz="1050" dirty="0"/>
           </a:p>
@@ -7871,118 +8795,213 @@
       </p:sp>
       <p:sp>
         <p:nvSpPr>
-          <p:cNvPr id="8" name="Shape 5"/>
+          <p:cNvPr id="9" name="Text 7"/>
+          <p:cNvSpPr txBox="1"/>
+          <p:nvPr/>
+        </p:nvSpPr>
+        <p:spPr>
+          <a:xfrm>
+            <a:off x="3520440" y="1783080"/>
+            <a:ext cx="2103120" cy="1737360"/>
+          </a:xfrm>
+          <a:prstGeom prst="rect">
+            <a:avLst/>
+          </a:prstGeom>
+          <a:noFill/>
+          <a:ln/>
+        </p:spPr>
+        <p:txBody>
+          <a:bodyPr wrap="square" lIns="0" tIns="0" rIns="0" bIns="0" rtlCol="0" anchor="t"/>
+          <a:lstStyle/>
+          <a:p>
+            <a:pPr marL="342900" indent="-342900">
+              <a:spcAft>
+                <a:spcPts val="300"/>
+              </a:spcAft>
+              <a:buSzPct val="100000"/>
+              <a:buChar char="•"/>
+            </a:pPr>
+            <a:r>
+              <a:rPr lang="en-US" sz="1000" dirty="0">
+                <a:solidFill>
+                  <a:srgbClr val="FFFFFF"/>
+                </a:solidFill>
+                <a:latin typeface="Calibri" pitchFamily="34" charset="0"/>
+                <a:ea typeface="Calibri" pitchFamily="34" charset="-122"/>
+                <a:cs typeface="Calibri" pitchFamily="34" charset="-120"/>
+              </a:rPr>
+              <a:t>Rule engine, 5 institutions</a:t>
+            </a:r>
+            <a:endParaRPr lang="en-US" sz="1000" dirty="0"/>
+          </a:p>
+          <a:p>
+            <a:pPr marL="342900" indent="-342900">
+              <a:spcAft>
+                <a:spcPts val="300"/>
+              </a:spcAft>
+              <a:buSzPct val="100000"/>
+              <a:buChar char="•"/>
+            </a:pPr>
+            <a:r>
+              <a:rPr lang="en-US" sz="1000" dirty="0">
+                <a:solidFill>
+                  <a:srgbClr val="FFFFFF"/>
+                </a:solidFill>
+                <a:latin typeface="Calibri" pitchFamily="34" charset="0"/>
+                <a:ea typeface="Calibri" pitchFamily="34" charset="-122"/>
+                <a:cs typeface="Calibri" pitchFamily="34" charset="-120"/>
+              </a:rPr>
+              <a:t>Versioned and unit-tested</a:t>
+            </a:r>
+            <a:endParaRPr lang="en-US" sz="1000" dirty="0"/>
+          </a:p>
+          <a:p>
+            <a:pPr marL="342900" indent="-342900">
+              <a:spcAft>
+                <a:spcPts val="300"/>
+              </a:spcAft>
+              <a:buSzPct val="100000"/>
+              <a:buChar char="•"/>
+            </a:pPr>
+            <a:r>
+              <a:rPr lang="en-US" sz="1000" dirty="0">
+                <a:solidFill>
+                  <a:srgbClr val="FFFFFF"/>
+                </a:solidFill>
+                <a:latin typeface="Calibri" pitchFamily="34" charset="0"/>
+                <a:ea typeface="Calibri" pitchFamily="34" charset="-122"/>
+                <a:cs typeface="Calibri" pitchFamily="34" charset="-120"/>
+              </a:rPr>
+              <a:t>Bring your own rules</a:t>
+            </a:r>
+            <a:endParaRPr lang="en-US" sz="1000" dirty="0"/>
+          </a:p>
+          <a:p>
+            <a:pPr marL="342900" indent="-342900">
+              <a:spcAft>
+                <a:spcPts val="300"/>
+              </a:spcAft>
+              <a:buSzPct val="100000"/>
+              <a:buChar char="•"/>
+            </a:pPr>
+            <a:r>
+              <a:rPr lang="en-US" sz="1000" dirty="0">
+                <a:solidFill>
+                  <a:srgbClr val="FFFFFF"/>
+                </a:solidFill>
+                <a:latin typeface="Calibri" pitchFamily="34" charset="0"/>
+                <a:ea typeface="Calibri" pitchFamily="34" charset="-122"/>
+                <a:cs typeface="Calibri" pitchFamily="34" charset="-120"/>
+              </a:rPr>
+              <a:t>Debate can only raise caution</a:t>
+            </a:r>
+            <a:endParaRPr lang="en-US" sz="1000" dirty="0"/>
+          </a:p>
+        </p:txBody>
+      </p:sp>
+      <p:sp>
+        <p:nvSpPr>
+          <p:cNvPr id="10" name="Shape 8"/>
           <p:cNvSpPr/>
           <p:nvPr/>
         </p:nvSpPr>
         <p:spPr>
           <a:xfrm>
-            <a:off x="457200" y="2221992"/>
-            <a:ext cx="502920" cy="502920"/>
-          </a:xfrm>
-          <a:prstGeom prst="ellipse">
-            <a:avLst/>
+            <a:off x="5943600" y="1371600"/>
+            <a:ext cx="2743200" cy="2240280"/>
+          </a:xfrm>
+          <a:prstGeom prst="roundRect">
+            <a:avLst>
+              <a:gd name="adj" fmla="val 3265"/>
+            </a:avLst>
           </a:prstGeom>
           <a:solidFill>
-            <a:srgbClr val="E3A33B"/>
+            <a:srgbClr val="FFFFFF"/>
           </a:solidFill>
-          <a:ln w="12700">
+          <a:ln w="9525">
             <a:solidFill>
-              <a:srgbClr val="E3A33B"/>
+              <a:srgbClr val="D5E2DF"/>
             </a:solidFill>
             <a:prstDash val="solid"/>
           </a:ln>
-        </p:spPr>
-      </p:sp>
-      <p:pic>
-        <p:nvPicPr>
-          <p:cNvPr id="9" name="Image 1" descr="preencoded.png">    </p:cNvPr>
-          <p:cNvPicPr>
-            <a:picLocks noChangeAspect="1"/>
-          </p:cNvPicPr>
-          <p:nvPr/>
-        </p:nvPicPr>
-        <p:blipFill>
-          <a:blip r:embed="rId2"/>
-          <a:stretch>
-            <a:fillRect/>
-          </a:stretch>
-        </p:blipFill>
-        <p:spPr>
-          <a:xfrm>
-            <a:off x="587959" y="2352751"/>
-            <a:ext cx="241402" cy="241402"/>
-          </a:xfrm>
-          <a:prstGeom prst="rect">
-            <a:avLst/>
-          </a:prstGeom>
-        </p:spPr>
-      </p:pic>
-      <p:sp>
-        <p:nvSpPr>
-          <p:cNvPr id="10" name="Text 6"/>
-          <p:cNvSpPr txBox="1"/>
-          <p:nvPr/>
-        </p:nvSpPr>
-        <p:spPr>
-          <a:xfrm>
-            <a:off x="1143000" y="2203704"/>
-            <a:ext cx="7498080" cy="274320"/>
-          </a:xfrm>
-          <a:prstGeom prst="rect">
-            <a:avLst/>
-          </a:prstGeom>
-          <a:noFill/>
-          <a:ln/>
-        </p:spPr>
-        <p:txBody>
-          <a:bodyPr wrap="square" lIns="0" tIns="0" rIns="0" bIns="0" rtlCol="0" anchor="t"/>
-          <a:lstStyle/>
-          <a:p>
-            <a:pPr indent="0" marL="0">
-              <a:buNone/>
-            </a:pPr>
-            <a:r>
-              <a:rPr lang="en-US" sz="1400" b="1" dirty="0">
-                <a:solidFill>
-                  <a:srgbClr val="0F3D3E"/>
-                </a:solidFill>
-                <a:latin typeface="Calibri" pitchFamily="34" charset="0"/>
-                <a:ea typeface="Calibri" pitchFamily="34" charset="-122"/>
-                <a:cs typeface="Calibri" pitchFamily="34" charset="-120"/>
-              </a:rPr>
-              <a:t>The Two AI Debate</a:t>
-            </a:r>
-            <a:endParaRPr lang="en-US" sz="1400" dirty="0"/>
-          </a:p>
-        </p:txBody>
-      </p:sp>
-      <p:sp>
-        <p:nvSpPr>
-          <p:cNvPr id="11" name="Text 7"/>
-          <p:cNvSpPr txBox="1"/>
-          <p:nvPr/>
-        </p:nvSpPr>
-        <p:spPr>
-          <a:xfrm>
-            <a:off x="1143000" y="2478024"/>
-            <a:ext cx="7498080" cy="548640"/>
-          </a:xfrm>
-          <a:prstGeom prst="rect">
-            <a:avLst/>
-          </a:prstGeom>
-          <a:noFill/>
-          <a:ln/>
-        </p:spPr>
-        <p:txBody>
-          <a:bodyPr wrap="square" lIns="0" tIns="0" rIns="0" bIns="0" rtlCol="0" anchor="t"/>
-          <a:lstStyle/>
-          <a:p>
-            <a:pPr indent="0" marL="0">
-              <a:buNone/>
-            </a:pPr>
-            <a:r>
-              <a:rPr lang="en-US" sz="1050" dirty="0">
+          <a:effectLst>
+            <a:outerShdw sx="100000" sy="100000" kx="0" ky="0" algn="bl" rotWithShape="0" blurRad="101600" dist="25400" dir="5400000">
+              <a:srgbClr val="000000">
+                <a:alpha val="12000"/>
+              </a:srgbClr>
+            </a:outerShdw>
+          </a:effectLst>
+        </p:spPr>
+      </p:sp>
+      <p:sp>
+        <p:nvSpPr>
+          <p:cNvPr id="11" name="Text 9"/>
+          <p:cNvSpPr txBox="1"/>
+          <p:nvPr/>
+        </p:nvSpPr>
+        <p:spPr>
+          <a:xfrm>
+            <a:off x="6126480" y="1481328"/>
+            <a:ext cx="2377440" cy="274320"/>
+          </a:xfrm>
+          <a:prstGeom prst="rect">
+            <a:avLst/>
+          </a:prstGeom>
+          <a:noFill/>
+          <a:ln/>
+        </p:spPr>
+        <p:txBody>
+          <a:bodyPr wrap="square" lIns="0" tIns="0" rIns="0" bIns="0" rtlCol="0" anchor="t"/>
+          <a:lstStyle/>
+          <a:p>
+            <a:pPr indent="0" marL="0">
+              <a:buNone/>
+            </a:pPr>
+            <a:r>
+              <a:rPr lang="en-US" sz="1050" b="1" spc="150" kern="0" dirty="0">
+                <a:solidFill>
+                  <a:srgbClr val="5B6B6A"/>
+                </a:solidFill>
+                <a:latin typeface="Calibri" pitchFamily="34" charset="0"/>
+                <a:ea typeface="Calibri" pitchFamily="34" charset="-122"/>
+                <a:cs typeface="Calibri" pitchFamily="34" charset="-120"/>
+              </a:rPr>
+              <a:t>SERVES</a:t>
+            </a:r>
+            <a:endParaRPr lang="en-US" sz="1050" dirty="0"/>
+          </a:p>
+        </p:txBody>
+      </p:sp>
+      <p:sp>
+        <p:nvSpPr>
+          <p:cNvPr id="12" name="Text 10"/>
+          <p:cNvSpPr txBox="1"/>
+          <p:nvPr/>
+        </p:nvSpPr>
+        <p:spPr>
+          <a:xfrm>
+            <a:off x="6126480" y="1783080"/>
+            <a:ext cx="2377440" cy="1737360"/>
+          </a:xfrm>
+          <a:prstGeom prst="rect">
+            <a:avLst/>
+          </a:prstGeom>
+          <a:noFill/>
+          <a:ln/>
+        </p:spPr>
+        <p:txBody>
+          <a:bodyPr wrap="square" lIns="0" tIns="0" rIns="0" bIns="0" rtlCol="0" anchor="t"/>
+          <a:lstStyle/>
+          <a:p>
+            <a:pPr marL="342900" indent="-342900">
+              <a:spcAft>
+                <a:spcPts val="300"/>
+              </a:spcAft>
+              <a:buSzPct val="100000"/>
+              <a:buChar char="•"/>
+            </a:pPr>
+            <a:r>
+              <a:rPr lang="en-US" sz="1000" dirty="0">
                 <a:solidFill>
                   <a:srgbClr val="1B2424"/>
                 </a:solidFill>
@@ -7990,126 +9009,174 @@
                 <a:ea typeface="Calibri" pitchFamily="34" charset="-122"/>
                 <a:cs typeface="Calibri" pitchFamily="34" charset="-120"/>
               </a:rPr>
-              <a:t>One AI argues for the route, a second hunts for what could go wrong, a third gives the verdict with reasons and risks. The referee can only make advice more careful, never overrule the rules.</a:t>
-            </a:r>
-            <a:endParaRPr lang="en-US" sz="1050" dirty="0"/>
-          </a:p>
-        </p:txBody>
-      </p:sp>
-      <p:sp>
-        <p:nvSpPr>
-          <p:cNvPr id="12" name="Shape 8"/>
+              <a:t>Next.js 16, React 19, TypeScript</a:t>
+            </a:r>
+            <a:endParaRPr lang="en-US" sz="1000" dirty="0"/>
+          </a:p>
+          <a:p>
+            <a:pPr marL="342900" indent="-342900">
+              <a:spcAft>
+                <a:spcPts val="300"/>
+              </a:spcAft>
+              <a:buSzPct val="100000"/>
+              <a:buChar char="•"/>
+            </a:pPr>
+            <a:r>
+              <a:rPr lang="en-US" sz="1000" dirty="0">
+                <a:solidFill>
+                  <a:srgbClr val="1B2424"/>
+                </a:solidFill>
+                <a:latin typeface="Calibri" pitchFamily="34" charset="0"/>
+                <a:ea typeface="Calibri" pitchFamily="34" charset="-122"/>
+                <a:cs typeface="Calibri" pitchFamily="34" charset="-120"/>
+              </a:rPr>
+              <a:t>Public API with keys and limits</a:t>
+            </a:r>
+            <a:endParaRPr lang="en-US" sz="1000" dirty="0"/>
+          </a:p>
+          <a:p>
+            <a:pPr marL="342900" indent="-342900">
+              <a:spcAft>
+                <a:spcPts val="300"/>
+              </a:spcAft>
+              <a:buSzPct val="100000"/>
+              <a:buChar char="•"/>
+            </a:pPr>
+            <a:r>
+              <a:rPr lang="en-US" sz="1000" dirty="0">
+                <a:solidFill>
+                  <a:srgbClr val="1B2424"/>
+                </a:solidFill>
+                <a:latin typeface="Calibri" pitchFamily="34" charset="0"/>
+                <a:ea typeface="Calibri" pitchFamily="34" charset="-122"/>
+                <a:cs typeface="Calibri" pitchFamily="34" charset="-120"/>
+              </a:rPr>
+              <a:t>RFC 9457 errors, playground</a:t>
+            </a:r>
+            <a:endParaRPr lang="en-US" sz="1000" dirty="0"/>
+          </a:p>
+          <a:p>
+            <a:pPr marL="342900" indent="-342900">
+              <a:spcAft>
+                <a:spcPts val="300"/>
+              </a:spcAft>
+              <a:buSzPct val="100000"/>
+              <a:buChar char="•"/>
+            </a:pPr>
+            <a:r>
+              <a:rPr lang="en-US" sz="1000" dirty="0">
+                <a:solidFill>
+                  <a:srgbClr val="1B2424"/>
+                </a:solidFill>
+                <a:latin typeface="Calibri" pitchFamily="34" charset="0"/>
+                <a:ea typeface="Calibri" pitchFamily="34" charset="-122"/>
+                <a:cs typeface="Calibri" pitchFamily="34" charset="-120"/>
+              </a:rPr>
+              <a:t>Data stays in the browser</a:t>
+            </a:r>
+            <a:endParaRPr lang="en-US" sz="1000" dirty="0"/>
+          </a:p>
+        </p:txBody>
+      </p:sp>
+      <p:sp>
+        <p:nvSpPr>
+          <p:cNvPr id="13" name="Shape 11"/>
           <p:cNvSpPr/>
           <p:nvPr/>
         </p:nvSpPr>
         <p:spPr>
           <a:xfrm>
-            <a:off x="457200" y="3072384"/>
-            <a:ext cx="502920" cy="502920"/>
-          </a:xfrm>
-          <a:prstGeom prst="ellipse">
-            <a:avLst/>
+            <a:off x="457200" y="3794760"/>
+            <a:ext cx="1920240" cy="777240"/>
+          </a:xfrm>
+          <a:prstGeom prst="roundRect">
+            <a:avLst>
+              <a:gd name="adj" fmla="val 9412"/>
+            </a:avLst>
           </a:prstGeom>
           <a:solidFill>
-            <a:srgbClr val="0F3D3E"/>
+            <a:srgbClr val="FBF1DF"/>
           </a:solidFill>
-          <a:ln w="12700">
+          <a:ln w="9525">
             <a:solidFill>
-              <a:srgbClr val="0F3D3E"/>
+              <a:srgbClr val="FBF1DF"/>
             </a:solidFill>
             <a:prstDash val="solid"/>
           </a:ln>
-        </p:spPr>
-      </p:sp>
-      <p:pic>
-        <p:nvPicPr>
-          <p:cNvPr id="13" name="Image 2" descr="preencoded.png">    </p:cNvPr>
-          <p:cNvPicPr>
-            <a:picLocks noChangeAspect="1"/>
-          </p:cNvPicPr>
-          <p:nvPr/>
-        </p:nvPicPr>
-        <p:blipFill>
-          <a:blip r:embed="rId3"/>
-          <a:stretch>
-            <a:fillRect/>
-          </a:stretch>
-        </p:blipFill>
-        <p:spPr>
-          <a:xfrm>
-            <a:off x="587959" y="3203143"/>
-            <a:ext cx="241402" cy="241402"/>
-          </a:xfrm>
-          <a:prstGeom prst="rect">
-            <a:avLst/>
-          </a:prstGeom>
-        </p:spPr>
-      </p:pic>
-      <p:sp>
-        <p:nvSpPr>
-          <p:cNvPr id="14" name="Text 9"/>
-          <p:cNvSpPr txBox="1"/>
-          <p:nvPr/>
-        </p:nvSpPr>
-        <p:spPr>
-          <a:xfrm>
-            <a:off x="1143000" y="3054096"/>
-            <a:ext cx="7498080" cy="274320"/>
-          </a:xfrm>
-          <a:prstGeom prst="rect">
-            <a:avLst/>
-          </a:prstGeom>
-          <a:noFill/>
-          <a:ln/>
-        </p:spPr>
-        <p:txBody>
-          <a:bodyPr wrap="square" lIns="0" tIns="0" rIns="0" bIns="0" rtlCol="0" anchor="t"/>
-          <a:lstStyle/>
-          <a:p>
-            <a:pPr indent="0" marL="0">
-              <a:buNone/>
-            </a:pPr>
-            <a:r>
-              <a:rPr lang="en-US" sz="1400" b="1" dirty="0">
+          <a:effectLst>
+            <a:outerShdw sx="100000" sy="100000" kx="0" ky="0" algn="bl" rotWithShape="0" blurRad="101600" dist="25400" dir="5400000">
+              <a:srgbClr val="000000">
+                <a:alpha val="12000"/>
+              </a:srgbClr>
+            </a:outerShdw>
+          </a:effectLst>
+        </p:spPr>
+      </p:sp>
+      <p:sp>
+        <p:nvSpPr>
+          <p:cNvPr id="14" name="Text 12"/>
+          <p:cNvSpPr txBox="1"/>
+          <p:nvPr/>
+        </p:nvSpPr>
+        <p:spPr>
+          <a:xfrm>
+            <a:off x="594360" y="3877056"/>
+            <a:ext cx="1737360" cy="320040"/>
+          </a:xfrm>
+          <a:prstGeom prst="rect">
+            <a:avLst/>
+          </a:prstGeom>
+          <a:noFill/>
+          <a:ln/>
+        </p:spPr>
+        <p:txBody>
+          <a:bodyPr wrap="square" lIns="0" tIns="0" rIns="0" bIns="0" rtlCol="0" anchor="t"/>
+          <a:lstStyle/>
+          <a:p>
+            <a:pPr indent="0" marL="0">
+              <a:buNone/>
+            </a:pPr>
+            <a:r>
+              <a:rPr lang="en-US" sz="1700" b="1" dirty="0">
                 <a:solidFill>
                   <a:srgbClr val="0F3D3E"/>
                 </a:solidFill>
-                <a:latin typeface="Calibri" pitchFamily="34" charset="0"/>
-                <a:ea typeface="Calibri" pitchFamily="34" charset="-122"/>
-                <a:cs typeface="Calibri" pitchFamily="34" charset="-120"/>
-              </a:rPr>
-              <a:t>Safety by separation</a:t>
-            </a:r>
-            <a:endParaRPr lang="en-US" sz="1400" dirty="0"/>
-          </a:p>
-        </p:txBody>
-      </p:sp>
-      <p:sp>
-        <p:nvSpPr>
-          <p:cNvPr id="15" name="Text 10"/>
-          <p:cNvSpPr txBox="1"/>
-          <p:nvPr/>
-        </p:nvSpPr>
-        <p:spPr>
-          <a:xfrm>
-            <a:off x="1143000" y="3328416"/>
-            <a:ext cx="7498080" cy="548640"/>
-          </a:xfrm>
-          <a:prstGeom prst="rect">
-            <a:avLst/>
-          </a:prstGeom>
-          <a:noFill/>
-          <a:ln/>
-        </p:spPr>
-        <p:txBody>
-          <a:bodyPr wrap="square" lIns="0" tIns="0" rIns="0" bIns="0" rtlCol="0" anchor="t"/>
-          <a:lstStyle/>
-          <a:p>
-            <a:pPr indent="0" marL="0">
-              <a:buNone/>
-            </a:pPr>
-            <a:r>
-              <a:rPr lang="en-US" sz="1050" dirty="0">
+                <a:latin typeface="Cambria" pitchFamily="34" charset="0"/>
+                <a:ea typeface="Cambria" pitchFamily="34" charset="-122"/>
+                <a:cs typeface="Cambria" pitchFamily="34" charset="-120"/>
+              </a:rPr>
+              <a:t>47</a:t>
+            </a:r>
+            <a:endParaRPr lang="en-US" sz="1700" dirty="0"/>
+          </a:p>
+        </p:txBody>
+      </p:sp>
+      <p:sp>
+        <p:nvSpPr>
+          <p:cNvPr id="15" name="Text 13"/>
+          <p:cNvSpPr txBox="1"/>
+          <p:nvPr/>
+        </p:nvSpPr>
+        <p:spPr>
+          <a:xfrm>
+            <a:off x="594360" y="4206240"/>
+            <a:ext cx="1737360" cy="274320"/>
+          </a:xfrm>
+          <a:prstGeom prst="rect">
+            <a:avLst/>
+          </a:prstGeom>
+          <a:noFill/>
+          <a:ln/>
+        </p:spPr>
+        <p:txBody>
+          <a:bodyPr wrap="square" lIns="0" tIns="0" rIns="0" bIns="0" rtlCol="0" anchor="t"/>
+          <a:lstStyle/>
+          <a:p>
+            <a:pPr indent="0" marL="0">
+              <a:buNone/>
+            </a:pPr>
+            <a:r>
+              <a:rPr lang="en-US" sz="950" dirty="0">
                 <a:solidFill>
                   <a:srgbClr val="1B2424"/>
                 </a:solidFill>
@@ -8117,126 +9184,111 @@
                 <a:ea typeface="Calibri" pitchFamily="34" charset="-122"/>
                 <a:cs typeface="Calibri" pitchFamily="34" charset="-120"/>
               </a:rPr>
-              <a:t>The AI reads, explains and translates. Every legal decision comes from a deterministic, versioned, unit-tested rule engine, so an institution can audit it.</a:t>
-            </a:r>
-            <a:endParaRPr lang="en-US" sz="1050" dirty="0"/>
-          </a:p>
-        </p:txBody>
-      </p:sp>
-      <p:sp>
-        <p:nvSpPr>
-          <p:cNvPr id="16" name="Shape 11"/>
+              <a:t>automated tests</a:t>
+            </a:r>
+            <a:endParaRPr lang="en-US" sz="950" dirty="0"/>
+          </a:p>
+        </p:txBody>
+      </p:sp>
+      <p:sp>
+        <p:nvSpPr>
+          <p:cNvPr id="16" name="Shape 14"/>
           <p:cNvSpPr/>
           <p:nvPr/>
         </p:nvSpPr>
         <p:spPr>
           <a:xfrm>
-            <a:off x="457200" y="3922776"/>
-            <a:ext cx="502920" cy="502920"/>
-          </a:xfrm>
-          <a:prstGeom prst="ellipse">
-            <a:avLst/>
+            <a:off x="2542032" y="3794760"/>
+            <a:ext cx="1920240" cy="777240"/>
+          </a:xfrm>
+          <a:prstGeom prst="roundRect">
+            <a:avLst>
+              <a:gd name="adj" fmla="val 9412"/>
+            </a:avLst>
           </a:prstGeom>
           <a:solidFill>
-            <a:srgbClr val="0F3D3E"/>
+            <a:srgbClr val="FBF1DF"/>
           </a:solidFill>
-          <a:ln w="12700">
+          <a:ln w="9525">
             <a:solidFill>
-              <a:srgbClr val="0F3D3E"/>
+              <a:srgbClr val="FBF1DF"/>
             </a:solidFill>
             <a:prstDash val="solid"/>
           </a:ln>
-        </p:spPr>
-      </p:sp>
-      <p:pic>
-        <p:nvPicPr>
-          <p:cNvPr id="17" name="Image 3" descr="preencoded.png">    </p:cNvPr>
-          <p:cNvPicPr>
-            <a:picLocks noChangeAspect="1"/>
-          </p:cNvPicPr>
-          <p:nvPr/>
-        </p:nvPicPr>
-        <p:blipFill>
-          <a:blip r:embed="rId4"/>
-          <a:stretch>
-            <a:fillRect/>
-          </a:stretch>
-        </p:blipFill>
-        <p:spPr>
-          <a:xfrm>
-            <a:off x="587959" y="4053535"/>
-            <a:ext cx="241402" cy="241402"/>
-          </a:xfrm>
-          <a:prstGeom prst="rect">
-            <a:avLst/>
-          </a:prstGeom>
-        </p:spPr>
-      </p:pic>
-      <p:sp>
-        <p:nvSpPr>
-          <p:cNvPr id="18" name="Text 12"/>
-          <p:cNvSpPr txBox="1"/>
-          <p:nvPr/>
-        </p:nvSpPr>
-        <p:spPr>
-          <a:xfrm>
-            <a:off x="1143000" y="3904488"/>
-            <a:ext cx="7498080" cy="274320"/>
-          </a:xfrm>
-          <a:prstGeom prst="rect">
-            <a:avLst/>
-          </a:prstGeom>
-          <a:noFill/>
-          <a:ln/>
-        </p:spPr>
-        <p:txBody>
-          <a:bodyPr wrap="square" lIns="0" tIns="0" rIns="0" bIns="0" rtlCol="0" anchor="t"/>
-          <a:lstStyle/>
-          <a:p>
-            <a:pPr indent="0" marL="0">
-              <a:buNone/>
-            </a:pPr>
-            <a:r>
-              <a:rPr lang="en-US" sz="1400" b="1" dirty="0">
+          <a:effectLst>
+            <a:outerShdw sx="100000" sy="100000" kx="0" ky="0" algn="bl" rotWithShape="0" blurRad="101600" dist="25400" dir="5400000">
+              <a:srgbClr val="000000">
+                <a:alpha val="12000"/>
+              </a:srgbClr>
+            </a:outerShdw>
+          </a:effectLst>
+        </p:spPr>
+      </p:sp>
+      <p:sp>
+        <p:nvSpPr>
+          <p:cNvPr id="17" name="Text 15"/>
+          <p:cNvSpPr txBox="1"/>
+          <p:nvPr/>
+        </p:nvSpPr>
+        <p:spPr>
+          <a:xfrm>
+            <a:off x="2679192" y="3877056"/>
+            <a:ext cx="1737360" cy="320040"/>
+          </a:xfrm>
+          <a:prstGeom prst="rect">
+            <a:avLst/>
+          </a:prstGeom>
+          <a:noFill/>
+          <a:ln/>
+        </p:spPr>
+        <p:txBody>
+          <a:bodyPr wrap="square" lIns="0" tIns="0" rIns="0" bIns="0" rtlCol="0" anchor="t"/>
+          <a:lstStyle/>
+          <a:p>
+            <a:pPr indent="0" marL="0">
+              <a:buNone/>
+            </a:pPr>
+            <a:r>
+              <a:rPr lang="en-US" sz="1700" b="1" dirty="0">
                 <a:solidFill>
                   <a:srgbClr val="0F3D3E"/>
                 </a:solidFill>
-                <a:latin typeface="Calibri" pitchFamily="34" charset="0"/>
-                <a:ea typeface="Calibri" pitchFamily="34" charset="-122"/>
-                <a:cs typeface="Calibri" pitchFamily="34" charset="-120"/>
-              </a:rPr>
-              <a:t>Bring your own data, key and rules</a:t>
-            </a:r>
-            <a:endParaRPr lang="en-US" sz="1400" dirty="0"/>
-          </a:p>
-        </p:txBody>
-      </p:sp>
-      <p:sp>
-        <p:nvSpPr>
-          <p:cNvPr id="19" name="Text 13"/>
-          <p:cNvSpPr txBox="1"/>
-          <p:nvPr/>
-        </p:nvSpPr>
-        <p:spPr>
-          <a:xfrm>
-            <a:off x="1143000" y="4178808"/>
-            <a:ext cx="7498080" cy="548640"/>
-          </a:xfrm>
-          <a:prstGeom prst="rect">
-            <a:avLst/>
-          </a:prstGeom>
-          <a:noFill/>
-          <a:ln/>
-        </p:spPr>
-        <p:txBody>
-          <a:bodyPr wrap="square" lIns="0" tIns="0" rIns="0" bIns="0" rtlCol="0" anchor="t"/>
-          <a:lstStyle/>
-          <a:p>
-            <a:pPr indent="0" marL="0">
-              <a:buNone/>
-            </a:pPr>
-            <a:r>
-              <a:rPr lang="en-US" sz="1050" dirty="0">
+                <a:latin typeface="Cambria" pitchFamily="34" charset="0"/>
+                <a:ea typeface="Cambria" pitchFamily="34" charset="-122"/>
+                <a:cs typeface="Cambria" pitchFamily="34" charset="-120"/>
+              </a:rPr>
+              <a:t>0</a:t>
+            </a:r>
+            <a:endParaRPr lang="en-US" sz="1700" dirty="0"/>
+          </a:p>
+        </p:txBody>
+      </p:sp>
+      <p:sp>
+        <p:nvSpPr>
+          <p:cNvPr id="18" name="Text 16"/>
+          <p:cNvSpPr txBox="1"/>
+          <p:nvPr/>
+        </p:nvSpPr>
+        <p:spPr>
+          <a:xfrm>
+            <a:off x="2679192" y="4206240"/>
+            <a:ext cx="1737360" cy="274320"/>
+          </a:xfrm>
+          <a:prstGeom prst="rect">
+            <a:avLst/>
+          </a:prstGeom>
+          <a:noFill/>
+          <a:ln/>
+        </p:spPr>
+        <p:txBody>
+          <a:bodyPr wrap="square" lIns="0" tIns="0" rIns="0" bIns="0" rtlCol="0" anchor="t"/>
+          <a:lstStyle/>
+          <a:p>
+            <a:pPr indent="0" marL="0">
+              <a:buNone/>
+            </a:pPr>
+            <a:r>
+              <a:rPr lang="en-US" sz="950" dirty="0">
                 <a:solidFill>
                   <a:srgbClr val="1B2424"/>
                 </a:solidFill>
@@ -8244,9 +9296,233 @@
                 <a:ea typeface="Calibri" pitchFamily="34" charset="-122"/>
                 <a:cs typeface="Calibri" pitchFamily="34" charset="-120"/>
               </a:rPr>
-              <a:t>A bank sends its own claim rules as JSON. Virasat applies them and records the rule version on every claim.</a:t>
-            </a:r>
-            <a:endParaRPr lang="en-US" sz="1050" dirty="0"/>
+              <a:t>serious axe violations</a:t>
+            </a:r>
+            <a:endParaRPr lang="en-US" sz="950" dirty="0"/>
+          </a:p>
+        </p:txBody>
+      </p:sp>
+      <p:sp>
+        <p:nvSpPr>
+          <p:cNvPr id="19" name="Shape 17"/>
+          <p:cNvSpPr/>
+          <p:nvPr/>
+        </p:nvSpPr>
+        <p:spPr>
+          <a:xfrm>
+            <a:off x="4626864" y="3794760"/>
+            <a:ext cx="1920240" cy="777240"/>
+          </a:xfrm>
+          <a:prstGeom prst="roundRect">
+            <a:avLst>
+              <a:gd name="adj" fmla="val 9412"/>
+            </a:avLst>
+          </a:prstGeom>
+          <a:solidFill>
+            <a:srgbClr val="FBF1DF"/>
+          </a:solidFill>
+          <a:ln w="9525">
+            <a:solidFill>
+              <a:srgbClr val="FBF1DF"/>
+            </a:solidFill>
+            <a:prstDash val="solid"/>
+          </a:ln>
+          <a:effectLst>
+            <a:outerShdw sx="100000" sy="100000" kx="0" ky="0" algn="bl" rotWithShape="0" blurRad="101600" dist="25400" dir="5400000">
+              <a:srgbClr val="000000">
+                <a:alpha val="12000"/>
+              </a:srgbClr>
+            </a:outerShdw>
+          </a:effectLst>
+        </p:spPr>
+      </p:sp>
+      <p:sp>
+        <p:nvSpPr>
+          <p:cNvPr id="20" name="Text 18"/>
+          <p:cNvSpPr txBox="1"/>
+          <p:nvPr/>
+        </p:nvSpPr>
+        <p:spPr>
+          <a:xfrm>
+            <a:off x="4764024" y="3877056"/>
+            <a:ext cx="1737360" cy="320040"/>
+          </a:xfrm>
+          <a:prstGeom prst="rect">
+            <a:avLst/>
+          </a:prstGeom>
+          <a:noFill/>
+          <a:ln/>
+        </p:spPr>
+        <p:txBody>
+          <a:bodyPr wrap="square" lIns="0" tIns="0" rIns="0" bIns="0" rtlCol="0" anchor="t"/>
+          <a:lstStyle/>
+          <a:p>
+            <a:pPr indent="0" marL="0">
+              <a:buNone/>
+            </a:pPr>
+            <a:r>
+              <a:rPr lang="en-US" sz="1700" b="1" dirty="0">
+                <a:solidFill>
+                  <a:srgbClr val="0F3D3E"/>
+                </a:solidFill>
+                <a:latin typeface="Cambria" pitchFamily="34" charset="0"/>
+                <a:ea typeface="Cambria" pitchFamily="34" charset="-122"/>
+                <a:cs typeface="Cambria" pitchFamily="34" charset="-120"/>
+              </a:rPr>
+              <a:t>99 to 100</a:t>
+            </a:r>
+            <a:endParaRPr lang="en-US" sz="1700" dirty="0"/>
+          </a:p>
+        </p:txBody>
+      </p:sp>
+      <p:sp>
+        <p:nvSpPr>
+          <p:cNvPr id="21" name="Text 19"/>
+          <p:cNvSpPr txBox="1"/>
+          <p:nvPr/>
+        </p:nvSpPr>
+        <p:spPr>
+          <a:xfrm>
+            <a:off x="4764024" y="4206240"/>
+            <a:ext cx="1737360" cy="274320"/>
+          </a:xfrm>
+          <a:prstGeom prst="rect">
+            <a:avLst/>
+          </a:prstGeom>
+          <a:noFill/>
+          <a:ln/>
+        </p:spPr>
+        <p:txBody>
+          <a:bodyPr wrap="square" lIns="0" tIns="0" rIns="0" bIns="0" rtlCol="0" anchor="t"/>
+          <a:lstStyle/>
+          <a:p>
+            <a:pPr indent="0" marL="0">
+              <a:buNone/>
+            </a:pPr>
+            <a:r>
+              <a:rPr lang="en-US" sz="950" dirty="0">
+                <a:solidFill>
+                  <a:srgbClr val="1B2424"/>
+                </a:solidFill>
+                <a:latin typeface="Calibri" pitchFamily="34" charset="0"/>
+                <a:ea typeface="Calibri" pitchFamily="34" charset="-122"/>
+                <a:cs typeface="Calibri" pitchFamily="34" charset="-120"/>
+              </a:rPr>
+              <a:t>Lighthouse, desktop</a:t>
+            </a:r>
+            <a:endParaRPr lang="en-US" sz="950" dirty="0"/>
+          </a:p>
+        </p:txBody>
+      </p:sp>
+      <p:sp>
+        <p:nvSpPr>
+          <p:cNvPr id="22" name="Shape 20"/>
+          <p:cNvSpPr/>
+          <p:nvPr/>
+        </p:nvSpPr>
+        <p:spPr>
+          <a:xfrm>
+            <a:off x="6711696" y="3794760"/>
+            <a:ext cx="1920240" cy="777240"/>
+          </a:xfrm>
+          <a:prstGeom prst="roundRect">
+            <a:avLst>
+              <a:gd name="adj" fmla="val 9412"/>
+            </a:avLst>
+          </a:prstGeom>
+          <a:solidFill>
+            <a:srgbClr val="FBF1DF"/>
+          </a:solidFill>
+          <a:ln w="9525">
+            <a:solidFill>
+              <a:srgbClr val="FBF1DF"/>
+            </a:solidFill>
+            <a:prstDash val="solid"/>
+          </a:ln>
+          <a:effectLst>
+            <a:outerShdw sx="100000" sy="100000" kx="0" ky="0" algn="bl" rotWithShape="0" blurRad="101600" dist="25400" dir="5400000">
+              <a:srgbClr val="000000">
+                <a:alpha val="12000"/>
+              </a:srgbClr>
+            </a:outerShdw>
+          </a:effectLst>
+        </p:spPr>
+      </p:sp>
+      <p:sp>
+        <p:nvSpPr>
+          <p:cNvPr id="23" name="Text 21"/>
+          <p:cNvSpPr txBox="1"/>
+          <p:nvPr/>
+        </p:nvSpPr>
+        <p:spPr>
+          <a:xfrm>
+            <a:off x="6848856" y="3877056"/>
+            <a:ext cx="1737360" cy="320040"/>
+          </a:xfrm>
+          <a:prstGeom prst="rect">
+            <a:avLst/>
+          </a:prstGeom>
+          <a:noFill/>
+          <a:ln/>
+        </p:spPr>
+        <p:txBody>
+          <a:bodyPr wrap="square" lIns="0" tIns="0" rIns="0" bIns="0" rtlCol="0" anchor="t"/>
+          <a:lstStyle/>
+          <a:p>
+            <a:pPr indent="0" marL="0">
+              <a:buNone/>
+            </a:pPr>
+            <a:r>
+              <a:rPr lang="en-US" sz="1700" b="1" dirty="0">
+                <a:solidFill>
+                  <a:srgbClr val="0F3D3E"/>
+                </a:solidFill>
+                <a:latin typeface="Cambria" pitchFamily="34" charset="0"/>
+                <a:ea typeface="Cambria" pitchFamily="34" charset="-122"/>
+                <a:cs typeface="Cambria" pitchFamily="34" charset="-120"/>
+              </a:rPr>
+              <a:t>about ₹20</a:t>
+            </a:r>
+            <a:endParaRPr lang="en-US" sz="1700" dirty="0"/>
+          </a:p>
+        </p:txBody>
+      </p:sp>
+      <p:sp>
+        <p:nvSpPr>
+          <p:cNvPr id="24" name="Text 22"/>
+          <p:cNvSpPr txBox="1"/>
+          <p:nvPr/>
+        </p:nvSpPr>
+        <p:spPr>
+          <a:xfrm>
+            <a:off x="6848856" y="4206240"/>
+            <a:ext cx="1737360" cy="274320"/>
+          </a:xfrm>
+          <a:prstGeom prst="rect">
+            <a:avLst/>
+          </a:prstGeom>
+          <a:noFill/>
+          <a:ln/>
+        </p:spPr>
+        <p:txBody>
+          <a:bodyPr wrap="square" lIns="0" tIns="0" rIns="0" bIns="0" rtlCol="0" anchor="t"/>
+          <a:lstStyle/>
+          <a:p>
+            <a:pPr indent="0" marL="0">
+              <a:buNone/>
+            </a:pPr>
+            <a:r>
+              <a:rPr lang="en-US" sz="950" dirty="0">
+                <a:solidFill>
+                  <a:srgbClr val="1B2424"/>
+                </a:solidFill>
+                <a:latin typeface="Calibri" pitchFamily="34" charset="0"/>
+                <a:ea typeface="Calibri" pitchFamily="34" charset="-122"/>
+                <a:cs typeface="Calibri" pitchFamily="34" charset="-120"/>
+              </a:rPr>
+              <a:t>AI cost per family</a:t>
+            </a:r>
+            <a:endParaRPr lang="en-US" sz="950" dirty="0"/>
           </a:p>
         </p:txBody>
       </p:sp>
@@ -8258,9 +9534,9 @@
 </p:sld>
 </file>
 
-<file path=ppt/slides/slide6.xml><?xml version="1.0" encoding="utf-8"?>
+<file path=ppt/slides/slide7.xml><?xml version="1.0" encoding="utf-8"?>
 <p:sld xmlns:a="http://schemas.openxmlformats.org/drawingml/2006/main" xmlns:r="http://schemas.openxmlformats.org/officeDocument/2006/relationships" xmlns:p="http://schemas.openxmlformats.org/presentationml/2006/main">
-  <p:cSld name="Slide 6">
+  <p:cSld name="Slide 7">
     <p:bg>
       <p:bgPr>
         <a:solidFill>
@@ -8315,7 +9591,7 @@
                 <a:ea typeface="Calibri" pitchFamily="34" charset="-122"/>
                 <a:cs typeface="Calibri" pitchFamily="34" charset="-120"/>
               </a:rPr>
-              <a:t>03  ·  INNOVATION: THE TWO AI DEBATE</a:t>
+              <a:t>04  ·  TECHNICAL IMPLEMENTATION: MEASURED, NOT CLAIMED</a:t>
             </a:r>
             <a:endParaRPr lang="en-US" sz="1100" dirty="0"/>
           </a:p>
@@ -8354,7 +9630,7 @@
                 <a:ea typeface="Cambria" pitchFamily="34" charset="-122"/>
                 <a:cs typeface="Cambria" pitchFamily="34" charset="-120"/>
               </a:rPr>
-              <a:t>The Challenger caught what a single answer missed</a:t>
+              <a:t>Built for a cheap phone, in your language</a:t>
             </a:r>
             <a:endParaRPr lang="en-US" sz="2400" dirty="0"/>
           </a:p>
@@ -8368,16 +9644,16 @@
         </p:nvSpPr>
         <p:spPr>
           <a:xfrm>
-            <a:off x="457200" y="1371600"/>
-            <a:ext cx="4114800" cy="1371600"/>
+            <a:off x="420624" y="1335024"/>
+            <a:ext cx="4005072" cy="2267712"/>
           </a:xfrm>
           <a:prstGeom prst="roundRect">
             <a:avLst>
-              <a:gd name="adj" fmla="val 5333"/>
+              <a:gd name="adj" fmla="val 2419"/>
             </a:avLst>
           </a:prstGeom>
           <a:solidFill>
-            <a:srgbClr val="FFFFFF"/>
+            <a:srgbClr val="EDF2F1"/>
           </a:solidFill>
           <a:ln w="9525">
             <a:solidFill>
@@ -8394,102 +9670,48 @@
           </a:effectLst>
         </p:spPr>
       </p:sp>
-      <p:sp>
-        <p:nvSpPr>
-          <p:cNvPr id="5" name="Text 3"/>
-          <p:cNvSpPr txBox="1"/>
-          <p:nvPr/>
-        </p:nvSpPr>
-        <p:spPr>
-          <a:xfrm>
-            <a:off x="640080" y="1481328"/>
-            <a:ext cx="3657600" cy="228600"/>
-          </a:xfrm>
-          <a:prstGeom prst="rect">
-            <a:avLst/>
-          </a:prstGeom>
-          <a:noFill/>
-          <a:ln/>
-        </p:spPr>
-        <p:txBody>
-          <a:bodyPr wrap="square" lIns="0" tIns="0" rIns="0" bIns="0" rtlCol="0" anchor="t"/>
-          <a:lstStyle/>
-          <a:p>
-            <a:pPr indent="0" marL="0">
-              <a:buNone/>
-            </a:pPr>
-            <a:r>
-              <a:rPr lang="en-US" sz="1100" b="1" dirty="0">
-                <a:solidFill>
-                  <a:srgbClr val="1E7F4F"/>
-                </a:solidFill>
-                <a:latin typeface="Calibri" pitchFamily="34" charset="0"/>
-                <a:ea typeface="Calibri" pitchFamily="34" charset="-122"/>
-                <a:cs typeface="Calibri" pitchFamily="34" charset="-120"/>
-              </a:rPr>
-              <a:t>Supporter</a:t>
-            </a:r>
-            <a:endParaRPr lang="en-US" sz="1100" dirty="0"/>
-          </a:p>
-        </p:txBody>
-      </p:sp>
-      <p:sp>
-        <p:nvSpPr>
-          <p:cNvPr id="6" name="Text 4"/>
-          <p:cNvSpPr txBox="1"/>
-          <p:nvPr/>
-        </p:nvSpPr>
-        <p:spPr>
-          <a:xfrm>
-            <a:off x="640080" y="1737360"/>
-            <a:ext cx="3749040" cy="914400"/>
-          </a:xfrm>
-          <a:prstGeom prst="rect">
-            <a:avLst/>
-          </a:prstGeom>
-          <a:noFill/>
-          <a:ln/>
-        </p:spPr>
-        <p:txBody>
-          <a:bodyPr wrap="square" lIns="0" tIns="0" rIns="0" bIns="0" rtlCol="0" anchor="t"/>
-          <a:lstStyle/>
-          <a:p>
-            <a:pPr indent="0" marL="0">
-              <a:buNone/>
-            </a:pPr>
-            <a:r>
-              <a:rPr lang="en-US" sz="1050" dirty="0">
-                <a:solidFill>
-                  <a:srgbClr val="1B2424"/>
-                </a:solidFill>
-                <a:latin typeface="Calibri" pitchFamily="34" charset="0"/>
-                <a:ea typeface="Calibri" pitchFamily="34" charset="-122"/>
-                <a:cs typeface="Calibri" pitchFamily="34" charset="-120"/>
-              </a:rPr>
-              <a:t>The nominee route is correct: the passbook names a nominee and the amount is below the bank's threshold.</a:t>
-            </a:r>
-            <a:endParaRPr lang="en-US" sz="1050" dirty="0"/>
-          </a:p>
-        </p:txBody>
-      </p:sp>
-      <p:sp>
-        <p:nvSpPr>
-          <p:cNvPr id="7" name="Shape 5"/>
+      <p:pic>
+        <p:nvPicPr>
+          <p:cNvPr id="5" name="Image 0" descr="preencoded.png">    </p:cNvPr>
+          <p:cNvPicPr>
+            <a:picLocks noChangeAspect="1"/>
+          </p:cNvPicPr>
+          <p:nvPr/>
+        </p:nvPicPr>
+        <p:blipFill>
+          <a:blip r:embed="rId1"/>
+          <a:stretch>
+            <a:fillRect/>
+          </a:stretch>
+        </p:blipFill>
+        <p:spPr>
+          <a:xfrm>
+            <a:off x="457200" y="1371600"/>
+            <a:ext cx="3931920" cy="2194560"/>
+          </a:xfrm>
+          <a:prstGeom prst="rect">
+            <a:avLst/>
+          </a:prstGeom>
+        </p:spPr>
+      </p:pic>
+      <p:sp>
+        <p:nvSpPr>
+          <p:cNvPr id="6" name="Shape 3"/>
           <p:cNvSpPr/>
           <p:nvPr/>
         </p:nvSpPr>
         <p:spPr>
           <a:xfrm>
-            <a:off x="4663440" y="1371600"/>
-            <a:ext cx="4023360" cy="1371600"/>
+            <a:off x="4718304" y="1335024"/>
+            <a:ext cx="1490472" cy="3136392"/>
           </a:xfrm>
           <a:prstGeom prst="roundRect">
             <a:avLst>
-              <a:gd name="adj" fmla="val 5333"/>
+              <a:gd name="adj" fmla="val 3681"/>
             </a:avLst>
           </a:prstGeom>
           <a:solidFill>
-            <a:srgbClr val="FFFFFF"/>
+            <a:srgbClr val="EDF2F1"/>
           </a:solidFill>
           <a:ln w="9525">
             <a:solidFill>
@@ -8506,71 +9728,95 @@
           </a:effectLst>
         </p:spPr>
       </p:sp>
-      <p:sp>
-        <p:nvSpPr>
-          <p:cNvPr id="8" name="Text 6"/>
-          <p:cNvSpPr txBox="1"/>
-          <p:nvPr/>
-        </p:nvSpPr>
-        <p:spPr>
-          <a:xfrm>
-            <a:off x="4846320" y="1481328"/>
-            <a:ext cx="3657600" cy="228600"/>
-          </a:xfrm>
-          <a:prstGeom prst="rect">
-            <a:avLst/>
-          </a:prstGeom>
-          <a:noFill/>
-          <a:ln/>
-        </p:spPr>
-        <p:txBody>
-          <a:bodyPr wrap="square" lIns="0" tIns="0" rIns="0" bIns="0" rtlCol="0" anchor="t"/>
-          <a:lstStyle/>
-          <a:p>
-            <a:pPr indent="0" marL="0">
-              <a:buNone/>
-            </a:pPr>
-            <a:r>
-              <a:rPr lang="en-US" sz="1100" b="1" dirty="0">
-                <a:solidFill>
-                  <a:srgbClr val="8A5A00"/>
-                </a:solidFill>
-                <a:latin typeface="Calibri" pitchFamily="34" charset="0"/>
-                <a:ea typeface="Calibri" pitchFamily="34" charset="-122"/>
-                <a:cs typeface="Calibri" pitchFamily="34" charset="-120"/>
-              </a:rPr>
-              <a:t>Challenger</a:t>
-            </a:r>
-            <a:endParaRPr lang="en-US" sz="1100" dirty="0"/>
-          </a:p>
-        </p:txBody>
-      </p:sp>
-      <p:sp>
-        <p:nvSpPr>
-          <p:cNvPr id="9" name="Text 7"/>
-          <p:cNvSpPr txBox="1"/>
-          <p:nvPr/>
-        </p:nvSpPr>
-        <p:spPr>
-          <a:xfrm>
-            <a:off x="4846320" y="1737360"/>
-            <a:ext cx="3657600" cy="914400"/>
-          </a:xfrm>
-          <a:prstGeom prst="rect">
-            <a:avLst/>
-          </a:prstGeom>
-          <a:noFill/>
-          <a:ln/>
-        </p:spPr>
-        <p:txBody>
-          <a:bodyPr wrap="square" lIns="0" tIns="0" rIns="0" bIns="0" rtlCol="0" anchor="t"/>
-          <a:lstStyle/>
-          <a:p>
-            <a:pPr indent="0" marL="0">
-              <a:buNone/>
-            </a:pPr>
-            <a:r>
-              <a:rPr lang="en-US" sz="1050" dirty="0">
+      <p:pic>
+        <p:nvPicPr>
+          <p:cNvPr id="7" name="Image 1" descr="preencoded.png">    </p:cNvPr>
+          <p:cNvPicPr>
+            <a:picLocks noChangeAspect="1"/>
+          </p:cNvPicPr>
+          <p:nvPr/>
+        </p:nvPicPr>
+        <p:blipFill>
+          <a:blip r:embed="rId2"/>
+          <a:stretch>
+            <a:fillRect/>
+          </a:stretch>
+        </p:blipFill>
+        <p:spPr>
+          <a:xfrm>
+            <a:off x="4754880" y="1371600"/>
+            <a:ext cx="1417320" cy="3063240"/>
+          </a:xfrm>
+          <a:prstGeom prst="rect">
+            <a:avLst/>
+          </a:prstGeom>
+        </p:spPr>
+      </p:pic>
+      <p:sp>
+        <p:nvSpPr>
+          <p:cNvPr id="8" name="Text 4"/>
+          <p:cNvSpPr txBox="1"/>
+          <p:nvPr/>
+        </p:nvSpPr>
+        <p:spPr>
+          <a:xfrm>
+            <a:off x="6446520" y="1371600"/>
+            <a:ext cx="2286000" cy="228600"/>
+          </a:xfrm>
+          <a:prstGeom prst="rect">
+            <a:avLst/>
+          </a:prstGeom>
+          <a:noFill/>
+          <a:ln/>
+        </p:spPr>
+        <p:txBody>
+          <a:bodyPr wrap="square" lIns="0" tIns="0" rIns="0" bIns="0" rtlCol="0" anchor="t"/>
+          <a:lstStyle/>
+          <a:p>
+            <a:pPr indent="0" marL="0">
+              <a:buNone/>
+            </a:pPr>
+            <a:r>
+              <a:rPr lang="en-US" sz="1050" b="1" dirty="0">
+                <a:solidFill>
+                  <a:srgbClr val="0F3D3E"/>
+                </a:solidFill>
+                <a:latin typeface="Calibri" pitchFamily="34" charset="0"/>
+                <a:ea typeface="Calibri" pitchFamily="34" charset="-122"/>
+                <a:cs typeface="Calibri" pitchFamily="34" charset="-120"/>
+              </a:rPr>
+              <a:t>Accessibility (axe, WCAG 2.2 AA)</a:t>
+            </a:r>
+            <a:endParaRPr lang="en-US" sz="1050" dirty="0"/>
+          </a:p>
+        </p:txBody>
+      </p:sp>
+      <p:sp>
+        <p:nvSpPr>
+          <p:cNvPr id="9" name="Text 5"/>
+          <p:cNvSpPr txBox="1"/>
+          <p:nvPr/>
+        </p:nvSpPr>
+        <p:spPr>
+          <a:xfrm>
+            <a:off x="6446520" y="1591056"/>
+            <a:ext cx="2286000" cy="566928"/>
+          </a:xfrm>
+          <a:prstGeom prst="rect">
+            <a:avLst/>
+          </a:prstGeom>
+          <a:noFill/>
+          <a:ln/>
+        </p:spPr>
+        <p:txBody>
+          <a:bodyPr wrap="square" lIns="0" tIns="0" rIns="0" bIns="0" rtlCol="0" anchor="t"/>
+          <a:lstStyle/>
+          <a:p>
+            <a:pPr indent="0" marL="0">
+              <a:buNone/>
+            </a:pPr>
+            <a:r>
+              <a:rPr lang="en-US" sz="850" dirty="0">
                 <a:solidFill>
                   <a:srgbClr val="1B2424"/>
                 </a:solidFill>
@@ -8578,7 +9824,46 @@
                 <a:ea typeface="Calibri" pitchFamily="34" charset="-122"/>
                 <a:cs typeface="Calibri" pitchFamily="34" charset="-120"/>
               </a:rPr>
-              <a:t>The passbook says 'Sunita R Kulkarni'. Her ID may say 'Sunita Ramesh Kulkarni'. Banks reject claims on a spelling mismatch.</a:t>
+              <a:t>0 serious or critical across 11 pages, light and dark</a:t>
+            </a:r>
+            <a:endParaRPr lang="en-US" sz="850" dirty="0"/>
+          </a:p>
+        </p:txBody>
+      </p:sp>
+      <p:sp>
+        <p:nvSpPr>
+          <p:cNvPr id="10" name="Text 6"/>
+          <p:cNvSpPr txBox="1"/>
+          <p:nvPr/>
+        </p:nvSpPr>
+        <p:spPr>
+          <a:xfrm>
+            <a:off x="6446520" y="2148840"/>
+            <a:ext cx="2286000" cy="228600"/>
+          </a:xfrm>
+          <a:prstGeom prst="rect">
+            <a:avLst/>
+          </a:prstGeom>
+          <a:noFill/>
+          <a:ln/>
+        </p:spPr>
+        <p:txBody>
+          <a:bodyPr wrap="square" lIns="0" tIns="0" rIns="0" bIns="0" rtlCol="0" anchor="t"/>
+          <a:lstStyle/>
+          <a:p>
+            <a:pPr indent="0" marL="0">
+              <a:buNone/>
+            </a:pPr>
+            <a:r>
+              <a:rPr lang="en-US" sz="1050" b="1" dirty="0">
+                <a:solidFill>
+                  <a:srgbClr val="0F3D3E"/>
+                </a:solidFill>
+                <a:latin typeface="Calibri" pitchFamily="34" charset="0"/>
+                <a:ea typeface="Calibri" pitchFamily="34" charset="-122"/>
+                <a:cs typeface="Calibri" pitchFamily="34" charset="-120"/>
+              </a:rPr>
+              <a:t>Lighthouse, live, 3 runs each</a:t>
             </a:r>
             <a:endParaRPr lang="en-US" sz="1050" dirty="0"/>
           </a:p>
@@ -8586,142 +9871,225 @@
       </p:sp>
       <p:sp>
         <p:nvSpPr>
-          <p:cNvPr id="10" name="Shape 8"/>
-          <p:cNvSpPr/>
-          <p:nvPr/>
-        </p:nvSpPr>
-        <p:spPr>
-          <a:xfrm>
-            <a:off x="457200" y="2880360"/>
-            <a:ext cx="8229600" cy="1234440"/>
-          </a:xfrm>
-          <a:prstGeom prst="roundRect">
-            <a:avLst>
-              <a:gd name="adj" fmla="val 5926"/>
-            </a:avLst>
-          </a:prstGeom>
-          <a:solidFill>
-            <a:srgbClr val="0F3D3E"/>
-          </a:solidFill>
-          <a:ln w="9525">
-            <a:solidFill>
-              <a:srgbClr val="0F3D3E"/>
-            </a:solidFill>
-            <a:prstDash val="solid"/>
-          </a:ln>
-          <a:effectLst>
-            <a:outerShdw sx="100000" sy="100000" kx="0" ky="0" algn="bl" rotWithShape="0" blurRad="101600" dist="25400" dir="5400000">
-              <a:srgbClr val="000000">
-                <a:alpha val="12000"/>
-              </a:srgbClr>
-            </a:outerShdw>
-          </a:effectLst>
-        </p:spPr>
-      </p:sp>
-      <p:sp>
-        <p:nvSpPr>
-          <p:cNvPr id="11" name="Text 9"/>
-          <p:cNvSpPr txBox="1"/>
-          <p:nvPr/>
-        </p:nvSpPr>
-        <p:spPr>
-          <a:xfrm>
-            <a:off x="685800" y="2999232"/>
-            <a:ext cx="2743200" cy="228600"/>
-          </a:xfrm>
-          <a:prstGeom prst="rect">
-            <a:avLst/>
-          </a:prstGeom>
-          <a:noFill/>
-          <a:ln/>
-        </p:spPr>
-        <p:txBody>
-          <a:bodyPr wrap="square" lIns="0" tIns="0" rIns="0" bIns="0" rtlCol="0" anchor="t"/>
-          <a:lstStyle/>
-          <a:p>
-            <a:pPr indent="0" marL="0">
-              <a:buNone/>
-            </a:pPr>
-            <a:r>
-              <a:rPr lang="en-US" sz="1100" b="1" dirty="0">
-                <a:solidFill>
-                  <a:srgbClr val="E3A33B"/>
-                </a:solidFill>
-                <a:latin typeface="Calibri" pitchFamily="34" charset="0"/>
-                <a:ea typeface="Calibri" pitchFamily="34" charset="-122"/>
-                <a:cs typeface="Calibri" pitchFamily="34" charset="-120"/>
-              </a:rPr>
-              <a:t>Referee</a:t>
-            </a:r>
-            <a:endParaRPr lang="en-US" sz="1100" dirty="0"/>
-          </a:p>
-        </p:txBody>
-      </p:sp>
-      <p:sp>
-        <p:nvSpPr>
-          <p:cNvPr id="12" name="Text 10"/>
-          <p:cNvSpPr txBox="1"/>
-          <p:nvPr/>
-        </p:nvSpPr>
-        <p:spPr>
-          <a:xfrm>
-            <a:off x="685800" y="3255264"/>
-            <a:ext cx="7772400" cy="731520"/>
-          </a:xfrm>
-          <a:prstGeom prst="rect">
-            <a:avLst/>
-          </a:prstGeom>
-          <a:noFill/>
-          <a:ln/>
-        </p:spPr>
-        <p:txBody>
-          <a:bodyPr wrap="square" lIns="0" tIns="0" rIns="0" bIns="0" rtlCol="0" anchor="t"/>
-          <a:lstStyle/>
-          <a:p>
-            <a:pPr indent="0" marL="0">
-              <a:buNone/>
-            </a:pPr>
-            <a:r>
-              <a:rPr lang="en-US" sz="1300" dirty="0">
-                <a:solidFill>
-                  <a:srgbClr val="FFFFFF"/>
-                </a:solidFill>
-                <a:latin typeface="Calibri" pitchFamily="34" charset="0"/>
-                <a:ea typeface="Calibri" pitchFamily="34" charset="-122"/>
-                <a:cs typeface="Calibri" pitchFamily="34" charset="-120"/>
-              </a:rPr>
-              <a:t>Nominee route. High confidence. Next step: carry an ID that matches the nominee name exactly, or an affidavit for the name variation.</a:t>
-            </a:r>
-            <a:endParaRPr lang="en-US" sz="1300" dirty="0"/>
-          </a:p>
-        </p:txBody>
-      </p:sp>
-      <p:sp>
-        <p:nvSpPr>
-          <p:cNvPr id="13" name="Text 11"/>
-          <p:cNvSpPr txBox="1"/>
-          <p:nvPr/>
-        </p:nvSpPr>
-        <p:spPr>
-          <a:xfrm>
-            <a:off x="457200" y="4828032"/>
-            <a:ext cx="8229600" cy="228600"/>
-          </a:xfrm>
-          <a:prstGeom prst="rect">
-            <a:avLst/>
-          </a:prstGeom>
-          <a:noFill/>
-          <a:ln/>
-        </p:spPr>
-        <p:txBody>
-          <a:bodyPr wrap="square" lIns="0" tIns="0" rIns="0" bIns="0" rtlCol="0" anchor="ctr"/>
-          <a:lstStyle/>
-          <a:p>
-            <a:pPr indent="0" marL="0">
-              <a:buNone/>
-            </a:pPr>
-            <a:r>
-              <a:rPr lang="en-US" sz="800" dirty="0">
+          <p:cNvPr id="11" name="Text 7"/>
+          <p:cNvSpPr txBox="1"/>
+          <p:nvPr/>
+        </p:nvSpPr>
+        <p:spPr>
+          <a:xfrm>
+            <a:off x="6446520" y="2368296"/>
+            <a:ext cx="2286000" cy="566928"/>
+          </a:xfrm>
+          <a:prstGeom prst="rect">
+            <a:avLst/>
+          </a:prstGeom>
+          <a:noFill/>
+          <a:ln/>
+        </p:spPr>
+        <p:txBody>
+          <a:bodyPr wrap="square" lIns="0" tIns="0" rIns="0" bIns="0" rtlCol="0" anchor="t"/>
+          <a:lstStyle/>
+          <a:p>
+            <a:pPr indent="0" marL="0">
+              <a:buNone/>
+            </a:pPr>
+            <a:r>
+              <a:rPr lang="en-US" sz="850" dirty="0">
+                <a:solidFill>
+                  <a:srgbClr val="1B2424"/>
+                </a:solidFill>
+                <a:latin typeface="Calibri" pitchFamily="34" charset="0"/>
+                <a:ea typeface="Calibri" pitchFamily="34" charset="-122"/>
+                <a:cs typeface="Calibri" pitchFamily="34" charset="-120"/>
+              </a:rPr>
+              <a:t>99 to 100 desktop, never below 90 on a throttled phone. 100 accessibility, best practices and SEO on both, and layout shift under a quarter of the 0.1 threshold.</a:t>
+            </a:r>
+            <a:endParaRPr lang="en-US" sz="850" dirty="0"/>
+          </a:p>
+        </p:txBody>
+      </p:sp>
+      <p:sp>
+        <p:nvSpPr>
+          <p:cNvPr id="12" name="Text 8"/>
+          <p:cNvSpPr txBox="1"/>
+          <p:nvPr/>
+        </p:nvSpPr>
+        <p:spPr>
+          <a:xfrm>
+            <a:off x="6446520" y="2926080"/>
+            <a:ext cx="2286000" cy="228600"/>
+          </a:xfrm>
+          <a:prstGeom prst="rect">
+            <a:avLst/>
+          </a:prstGeom>
+          <a:noFill/>
+          <a:ln/>
+        </p:spPr>
+        <p:txBody>
+          <a:bodyPr wrap="square" lIns="0" tIns="0" rIns="0" bIns="0" rtlCol="0" anchor="t"/>
+          <a:lstStyle/>
+          <a:p>
+            <a:pPr indent="0" marL="0">
+              <a:buNone/>
+            </a:pPr>
+            <a:r>
+              <a:rPr lang="en-US" sz="1050" b="1" dirty="0">
+                <a:solidFill>
+                  <a:srgbClr val="0F3D3E"/>
+                </a:solidFill>
+                <a:latin typeface="Calibri" pitchFamily="34" charset="0"/>
+                <a:ea typeface="Calibri" pitchFamily="34" charset="-122"/>
+                <a:cs typeface="Calibri" pitchFamily="34" charset="-120"/>
+              </a:rPr>
+              <a:t>Works with no signal</a:t>
+            </a:r>
+            <a:endParaRPr lang="en-US" sz="1050" dirty="0"/>
+          </a:p>
+        </p:txBody>
+      </p:sp>
+      <p:sp>
+        <p:nvSpPr>
+          <p:cNvPr id="13" name="Text 9"/>
+          <p:cNvSpPr txBox="1"/>
+          <p:nvPr/>
+        </p:nvSpPr>
+        <p:spPr>
+          <a:xfrm>
+            <a:off x="6446520" y="3145536"/>
+            <a:ext cx="2286000" cy="566928"/>
+          </a:xfrm>
+          <a:prstGeom prst="rect">
+            <a:avLst/>
+          </a:prstGeom>
+          <a:noFill/>
+          <a:ln/>
+        </p:spPr>
+        <p:txBody>
+          <a:bodyPr wrap="square" lIns="0" tIns="0" rIns="0" bIns="0" rtlCol="0" anchor="t"/>
+          <a:lstStyle/>
+          <a:p>
+            <a:pPr indent="0" marL="0">
+              <a:buNone/>
+            </a:pPr>
+            <a:r>
+              <a:rPr lang="en-US" sz="850" dirty="0">
+                <a:solidFill>
+                  <a:srgbClr val="1B2424"/>
+                </a:solidFill>
+                <a:latin typeface="Calibri" pitchFamily="34" charset="0"/>
+                <a:ea typeface="Calibri" pitchFamily="34" charset="-122"/>
+                <a:cs typeface="Calibri" pitchFamily="34" charset="-120"/>
+              </a:rPr>
+              <a:t>Installable. A service worker keeps every opened page, the Vault and the glossary working offline, and says which steps are waiting.</a:t>
+            </a:r>
+            <a:endParaRPr lang="en-US" sz="850" dirty="0"/>
+          </a:p>
+        </p:txBody>
+      </p:sp>
+      <p:sp>
+        <p:nvSpPr>
+          <p:cNvPr id="14" name="Text 10"/>
+          <p:cNvSpPr txBox="1"/>
+          <p:nvPr/>
+        </p:nvSpPr>
+        <p:spPr>
+          <a:xfrm>
+            <a:off x="6446520" y="3703320"/>
+            <a:ext cx="2286000" cy="228600"/>
+          </a:xfrm>
+          <a:prstGeom prst="rect">
+            <a:avLst/>
+          </a:prstGeom>
+          <a:noFill/>
+          <a:ln/>
+        </p:spPr>
+        <p:txBody>
+          <a:bodyPr wrap="square" lIns="0" tIns="0" rIns="0" bIns="0" rtlCol="0" anchor="t"/>
+          <a:lstStyle/>
+          <a:p>
+            <a:pPr indent="0" marL="0">
+              <a:buNone/>
+            </a:pPr>
+            <a:r>
+              <a:rPr lang="en-US" sz="1050" b="1" dirty="0">
+                <a:solidFill>
+                  <a:srgbClr val="0F3D3E"/>
+                </a:solidFill>
+                <a:latin typeface="Calibri" pitchFamily="34" charset="0"/>
+                <a:ea typeface="Calibri" pitchFamily="34" charset="-122"/>
+                <a:cs typeface="Calibri" pitchFamily="34" charset="-120"/>
+              </a:rPr>
+              <a:t>Languages and reach</a:t>
+            </a:r>
+            <a:endParaRPr lang="en-US" sz="1050" dirty="0"/>
+          </a:p>
+        </p:txBody>
+      </p:sp>
+      <p:sp>
+        <p:nvSpPr>
+          <p:cNvPr id="15" name="Text 11"/>
+          <p:cNvSpPr txBox="1"/>
+          <p:nvPr/>
+        </p:nvSpPr>
+        <p:spPr>
+          <a:xfrm>
+            <a:off x="6446520" y="3922776"/>
+            <a:ext cx="2286000" cy="566928"/>
+          </a:xfrm>
+          <a:prstGeom prst="rect">
+            <a:avLst/>
+          </a:prstGeom>
+          <a:noFill/>
+          <a:ln/>
+        </p:spPr>
+        <p:txBody>
+          <a:bodyPr wrap="square" lIns="0" tIns="0" rIns="0" bIns="0" rtlCol="0" anchor="t"/>
+          <a:lstStyle/>
+          <a:p>
+            <a:pPr indent="0" marL="0">
+              <a:buNone/>
+            </a:pPr>
+            <a:r>
+              <a:rPr lang="en-US" sz="850" dirty="0">
+                <a:solidFill>
+                  <a:srgbClr val="1B2424"/>
+                </a:solidFill>
+                <a:latin typeface="Calibri" pitchFamily="34" charset="0"/>
+                <a:ea typeface="Calibri" pitchFamily="34" charset="-122"/>
+                <a:cs typeface="Calibri" pitchFamily="34" charset="-120"/>
+              </a:rPr>
+              <a:t>English and Hindi on every screen including the rule output and the debate. 320 px, 44 px controls, voice in and out, no sign up.</a:t>
+            </a:r>
+            <a:endParaRPr lang="en-US" sz="850" dirty="0"/>
+          </a:p>
+        </p:txBody>
+      </p:sp>
+      <p:sp>
+        <p:nvSpPr>
+          <p:cNvPr id="16" name="Text 12"/>
+          <p:cNvSpPr txBox="1"/>
+          <p:nvPr/>
+        </p:nvSpPr>
+        <p:spPr>
+          <a:xfrm>
+            <a:off x="457200" y="3703320"/>
+            <a:ext cx="3931920" cy="274320"/>
+          </a:xfrm>
+          <a:prstGeom prst="rect">
+            <a:avLst/>
+          </a:prstGeom>
+          <a:noFill/>
+          <a:ln/>
+        </p:spPr>
+        <p:txBody>
+          <a:bodyPr wrap="square" lIns="0" tIns="0" rIns="0" bIns="0" rtlCol="0" anchor="t"/>
+          <a:lstStyle/>
+          <a:p>
+            <a:pPr indent="0" marL="0">
+              <a:buNone/>
+            </a:pPr>
+            <a:r>
+              <a:rPr lang="en-US" sz="1000" dirty="0">
                 <a:solidFill>
                   <a:srgbClr val="5B6B6A"/>
                 </a:solidFill>
@@ -8729,9 +10097,9 @@
                 <a:ea typeface="Calibri" pitchFamily="34" charset="-122"/>
                 <a:cs typeface="Calibri" pitchFamily="34" charset="-120"/>
               </a:rPr>
-              <a:t>Research: multi-agent debate improves factual accuracy (Du and others, ICML 2024). Newer work warns it is not always better, so we measure it: npm run eval reports how often the Challenger catches a planted problem, with and without the debate. Both numbers are published on the site.</a:t>
-            </a:r>
-            <a:endParaRPr lang="en-US" sz="800" dirty="0"/>
+              <a:t>Dark mode and Hindi are one tap from any screen.</a:t>
+            </a:r>
+            <a:endParaRPr lang="en-US" sz="1000" dirty="0"/>
           </a:p>
         </p:txBody>
       </p:sp>
@@ -8743,9 +10111,9 @@
 </p:sld>
 </file>
 
-<file path=ppt/slides/slide7.xml><?xml version="1.0" encoding="utf-8"?>
+<file path=ppt/slides/slide8.xml><?xml version="1.0" encoding="utf-8"?>
 <p:sld xmlns:a="http://schemas.openxmlformats.org/drawingml/2006/main" xmlns:r="http://schemas.openxmlformats.org/officeDocument/2006/relationships" xmlns:p="http://schemas.openxmlformats.org/presentationml/2006/main">
-  <p:cSld name="Slide 7">
+  <p:cSld name="Slide 8">
     <p:bg>
       <p:bgPr>
         <a:solidFill>
@@ -8800,7 +10168,7 @@
                 <a:ea typeface="Calibri" pitchFamily="34" charset="-122"/>
                 <a:cs typeface="Calibri" pitchFamily="34" charset="-120"/>
               </a:rPr>
-              <a:t>04  ·  TECHNICAL IMPLEMENTATION</a:t>
+              <a:t>05  ·  PRODUCT DEMONSTRATION</a:t>
             </a:r>
             <a:endParaRPr lang="en-US" sz="1100" dirty="0"/>
           </a:p>
@@ -8831,7 +10199,7 @@
               <a:buNone/>
             </a:pPr>
             <a:r>
-              <a:rPr lang="en-US" sz="2600" b="1" dirty="0">
+              <a:rPr lang="en-US" sz="2400" b="1" dirty="0">
                 <a:solidFill>
                   <a:srgbClr val="1B2424"/>
                 </a:solidFill>
@@ -8839,9 +10207,9 @@
                 <a:ea typeface="Cambria" pitchFamily="34" charset="-122"/>
                 <a:cs typeface="Cambria" pitchFamily="34" charset="-120"/>
               </a:rPr>
-              <a:t>What is actually built</a:t>
-            </a:r>
-            <a:endParaRPr lang="en-US" sz="2600" dirty="0"/>
+              <a:t>This is the working product, not a mock-up</a:t>
+            </a:r>
+            <a:endParaRPr lang="en-US" sz="2400" dirty="0"/>
           </a:p>
         </p:txBody>
       </p:sp>
@@ -8853,1107 +10221,12 @@
         </p:nvSpPr>
         <p:spPr>
           <a:xfrm>
-            <a:off x="457200" y="1371600"/>
-            <a:ext cx="2743200" cy="2240280"/>
+            <a:off x="420624" y="1289304"/>
+            <a:ext cx="4096512" cy="2907792"/>
           </a:xfrm>
           <a:prstGeom prst="roundRect">
             <a:avLst>
-              <a:gd name="adj" fmla="val 3265"/>
-            </a:avLst>
-          </a:prstGeom>
-          <a:solidFill>
-            <a:srgbClr val="FFFFFF"/>
-          </a:solidFill>
-          <a:ln w="9525">
-            <a:solidFill>
-              <a:srgbClr val="D5E2DF"/>
-            </a:solidFill>
-            <a:prstDash val="solid"/>
-          </a:ln>
-          <a:effectLst>
-            <a:outerShdw sx="100000" sy="100000" kx="0" ky="0" algn="bl" rotWithShape="0" blurRad="101600" dist="25400" dir="5400000">
-              <a:srgbClr val="000000">
-                <a:alpha val="12000"/>
-              </a:srgbClr>
-            </a:outerShdw>
-          </a:effectLst>
-        </p:spPr>
-      </p:sp>
-      <p:sp>
-        <p:nvSpPr>
-          <p:cNvPr id="5" name="Text 3"/>
-          <p:cNvSpPr txBox="1"/>
-          <p:nvPr/>
-        </p:nvSpPr>
-        <p:spPr>
-          <a:xfrm>
-            <a:off x="640080" y="1481328"/>
-            <a:ext cx="2377440" cy="274320"/>
-          </a:xfrm>
-          <a:prstGeom prst="rect">
-            <a:avLst/>
-          </a:prstGeom>
-          <a:noFill/>
-          <a:ln/>
-        </p:spPr>
-        <p:txBody>
-          <a:bodyPr wrap="square" lIns="0" tIns="0" rIns="0" bIns="0" rtlCol="0" anchor="t"/>
-          <a:lstStyle/>
-          <a:p>
-            <a:pPr indent="0" marL="0">
-              <a:buNone/>
-            </a:pPr>
-            <a:r>
-              <a:rPr lang="en-US" sz="1050" b="1" spc="150" kern="0" dirty="0">
-                <a:solidFill>
-                  <a:srgbClr val="5B6B6A"/>
-                </a:solidFill>
-                <a:latin typeface="Calibri" pitchFamily="34" charset="0"/>
-                <a:ea typeface="Calibri" pitchFamily="34" charset="-122"/>
-                <a:cs typeface="Calibri" pitchFamily="34" charset="-120"/>
-              </a:rPr>
-              <a:t>READS AND WRITES</a:t>
-            </a:r>
-            <a:endParaRPr lang="en-US" sz="1050" dirty="0"/>
-          </a:p>
-        </p:txBody>
-      </p:sp>
-      <p:sp>
-        <p:nvSpPr>
-          <p:cNvPr id="6" name="Text 4"/>
-          <p:cNvSpPr txBox="1"/>
-          <p:nvPr/>
-        </p:nvSpPr>
-        <p:spPr>
-          <a:xfrm>
-            <a:off x="640080" y="1783080"/>
-            <a:ext cx="2377440" cy="1737360"/>
-          </a:xfrm>
-          <a:prstGeom prst="rect">
-            <a:avLst/>
-          </a:prstGeom>
-          <a:noFill/>
-          <a:ln/>
-        </p:spPr>
-        <p:txBody>
-          <a:bodyPr wrap="square" lIns="0" tIns="0" rIns="0" bIns="0" rtlCol="0" anchor="t"/>
-          <a:lstStyle/>
-          <a:p>
-            <a:pPr marL="342900" indent="-342900">
-              <a:spcAft>
-                <a:spcPts val="300"/>
-              </a:spcAft>
-              <a:buSzPct val="100000"/>
-              <a:buChar char="•"/>
-            </a:pPr>
-            <a:r>
-              <a:rPr lang="en-US" sz="1000" dirty="0">
-                <a:solidFill>
-                  <a:srgbClr val="1B2424"/>
-                </a:solidFill>
-                <a:latin typeface="Calibri" pitchFamily="34" charset="0"/>
-                <a:ea typeface="Calibri" pitchFamily="34" charset="-122"/>
-                <a:cs typeface="Calibri" pitchFamily="34" charset="-120"/>
-              </a:rPr>
-              <a:t>Claude Opus 5 with JSON schema outputs</a:t>
-            </a:r>
-            <a:endParaRPr lang="en-US" sz="1000" dirty="0"/>
-          </a:p>
-          <a:p>
-            <a:pPr marL="342900" indent="-342900">
-              <a:spcAft>
-                <a:spcPts val="300"/>
-              </a:spcAft>
-              <a:buSzPct val="100000"/>
-              <a:buChar char="•"/>
-            </a:pPr>
-            <a:r>
-              <a:rPr lang="en-US" sz="1000" dirty="0">
-                <a:solidFill>
-                  <a:srgbClr val="1B2424"/>
-                </a:solidFill>
-                <a:latin typeface="Calibri" pitchFamily="34" charset="0"/>
-                <a:ea typeface="Calibri" pitchFamily="34" charset="-122"/>
-                <a:cs typeface="Calibri" pitchFamily="34" charset="-120"/>
-              </a:rPr>
-              <a:t>AIS PDF tables parsed in code</a:t>
-            </a:r>
-            <a:endParaRPr lang="en-US" sz="1000" dirty="0"/>
-          </a:p>
-          <a:p>
-            <a:pPr marL="342900" indent="-342900">
-              <a:spcAft>
-                <a:spcPts val="300"/>
-              </a:spcAft>
-              <a:buSzPct val="100000"/>
-              <a:buChar char="•"/>
-            </a:pPr>
-            <a:r>
-              <a:rPr lang="en-US" sz="1000" dirty="0">
-                <a:solidFill>
-                  <a:srgbClr val="1B2424"/>
-                </a:solidFill>
-                <a:latin typeface="Calibri" pitchFamily="34" charset="0"/>
-                <a:ea typeface="Calibri" pitchFamily="34" charset="-122"/>
-                <a:cs typeface="Calibri" pitchFamily="34" charset="-120"/>
-              </a:rPr>
-              <a:t>Claim packs built with pdf-lib</a:t>
-            </a:r>
-            <a:endParaRPr lang="en-US" sz="1000" dirty="0"/>
-          </a:p>
-          <a:p>
-            <a:pPr marL="342900" indent="-342900">
-              <a:spcAft>
-                <a:spcPts val="300"/>
-              </a:spcAft>
-              <a:buSzPct val="100000"/>
-              <a:buChar char="•"/>
-            </a:pPr>
-            <a:r>
-              <a:rPr lang="en-US" sz="1000" dirty="0">
-                <a:solidFill>
-                  <a:srgbClr val="1B2424"/>
-                </a:solidFill>
-                <a:latin typeface="Calibri" pitchFamily="34" charset="0"/>
-                <a:ea typeface="Calibri" pitchFamily="34" charset="-122"/>
-                <a:cs typeface="Calibri" pitchFamily="34" charset="-120"/>
-              </a:rPr>
-              <a:t>Browser speech in and out</a:t>
-            </a:r>
-            <a:endParaRPr lang="en-US" sz="1000" dirty="0"/>
-          </a:p>
-        </p:txBody>
-      </p:sp>
-      <p:sp>
-        <p:nvSpPr>
-          <p:cNvPr id="7" name="Shape 5"/>
-          <p:cNvSpPr/>
-          <p:nvPr/>
-        </p:nvSpPr>
-        <p:spPr>
-          <a:xfrm>
-            <a:off x="3337560" y="1371600"/>
-            <a:ext cx="2468880" cy="2240280"/>
-          </a:xfrm>
-          <a:prstGeom prst="roundRect">
-            <a:avLst>
-              <a:gd name="adj" fmla="val 3265"/>
-            </a:avLst>
-          </a:prstGeom>
-          <a:solidFill>
-            <a:srgbClr val="0F3D3E"/>
-          </a:solidFill>
-          <a:ln w="9525">
-            <a:solidFill>
-              <a:srgbClr val="0F3D3E"/>
-            </a:solidFill>
-            <a:prstDash val="solid"/>
-          </a:ln>
-          <a:effectLst>
-            <a:outerShdw sx="100000" sy="100000" kx="0" ky="0" algn="bl" rotWithShape="0" blurRad="101600" dist="25400" dir="5400000">
-              <a:srgbClr val="000000">
-                <a:alpha val="12000"/>
-              </a:srgbClr>
-            </a:outerShdw>
-          </a:effectLst>
-        </p:spPr>
-      </p:sp>
-      <p:sp>
-        <p:nvSpPr>
-          <p:cNvPr id="8" name="Text 6"/>
-          <p:cNvSpPr txBox="1"/>
-          <p:nvPr/>
-        </p:nvSpPr>
-        <p:spPr>
-          <a:xfrm>
-            <a:off x="3520440" y="1481328"/>
-            <a:ext cx="2103120" cy="274320"/>
-          </a:xfrm>
-          <a:prstGeom prst="rect">
-            <a:avLst/>
-          </a:prstGeom>
-          <a:noFill/>
-          <a:ln/>
-        </p:spPr>
-        <p:txBody>
-          <a:bodyPr wrap="square" lIns="0" tIns="0" rIns="0" bIns="0" rtlCol="0" anchor="t"/>
-          <a:lstStyle/>
-          <a:p>
-            <a:pPr indent="0" marL="0">
-              <a:buNone/>
-            </a:pPr>
-            <a:r>
-              <a:rPr lang="en-US" sz="1050" b="1" spc="150" kern="0" dirty="0">
-                <a:solidFill>
-                  <a:srgbClr val="E3A33B"/>
-                </a:solidFill>
-                <a:latin typeface="Calibri" pitchFamily="34" charset="0"/>
-                <a:ea typeface="Calibri" pitchFamily="34" charset="-122"/>
-                <a:cs typeface="Calibri" pitchFamily="34" charset="-120"/>
-              </a:rPr>
-              <a:t>DECIDES</a:t>
-            </a:r>
-            <a:endParaRPr lang="en-US" sz="1050" dirty="0"/>
-          </a:p>
-        </p:txBody>
-      </p:sp>
-      <p:sp>
-        <p:nvSpPr>
-          <p:cNvPr id="9" name="Text 7"/>
-          <p:cNvSpPr txBox="1"/>
-          <p:nvPr/>
-        </p:nvSpPr>
-        <p:spPr>
-          <a:xfrm>
-            <a:off x="3520440" y="1783080"/>
-            <a:ext cx="2103120" cy="1737360"/>
-          </a:xfrm>
-          <a:prstGeom prst="rect">
-            <a:avLst/>
-          </a:prstGeom>
-          <a:noFill/>
-          <a:ln/>
-        </p:spPr>
-        <p:txBody>
-          <a:bodyPr wrap="square" lIns="0" tIns="0" rIns="0" bIns="0" rtlCol="0" anchor="t"/>
-          <a:lstStyle/>
-          <a:p>
-            <a:pPr marL="342900" indent="-342900">
-              <a:spcAft>
-                <a:spcPts val="300"/>
-              </a:spcAft>
-              <a:buSzPct val="100000"/>
-              <a:buChar char="•"/>
-            </a:pPr>
-            <a:r>
-              <a:rPr lang="en-US" sz="1000" dirty="0">
-                <a:solidFill>
-                  <a:srgbClr val="FFFFFF"/>
-                </a:solidFill>
-                <a:latin typeface="Calibri" pitchFamily="34" charset="0"/>
-                <a:ea typeface="Calibri" pitchFamily="34" charset="-122"/>
-                <a:cs typeface="Calibri" pitchFamily="34" charset="-120"/>
-              </a:rPr>
-              <a:t>Rule engine, 5 institutions</a:t>
-            </a:r>
-            <a:endParaRPr lang="en-US" sz="1000" dirty="0"/>
-          </a:p>
-          <a:p>
-            <a:pPr marL="342900" indent="-342900">
-              <a:spcAft>
-                <a:spcPts val="300"/>
-              </a:spcAft>
-              <a:buSzPct val="100000"/>
-              <a:buChar char="•"/>
-            </a:pPr>
-            <a:r>
-              <a:rPr lang="en-US" sz="1000" dirty="0">
-                <a:solidFill>
-                  <a:srgbClr val="FFFFFF"/>
-                </a:solidFill>
-                <a:latin typeface="Calibri" pitchFamily="34" charset="0"/>
-                <a:ea typeface="Calibri" pitchFamily="34" charset="-122"/>
-                <a:cs typeface="Calibri" pitchFamily="34" charset="-120"/>
-              </a:rPr>
-              <a:t>Versioned and unit-tested</a:t>
-            </a:r>
-            <a:endParaRPr lang="en-US" sz="1000" dirty="0"/>
-          </a:p>
-          <a:p>
-            <a:pPr marL="342900" indent="-342900">
-              <a:spcAft>
-                <a:spcPts val="300"/>
-              </a:spcAft>
-              <a:buSzPct val="100000"/>
-              <a:buChar char="•"/>
-            </a:pPr>
-            <a:r>
-              <a:rPr lang="en-US" sz="1000" dirty="0">
-                <a:solidFill>
-                  <a:srgbClr val="FFFFFF"/>
-                </a:solidFill>
-                <a:latin typeface="Calibri" pitchFamily="34" charset="0"/>
-                <a:ea typeface="Calibri" pitchFamily="34" charset="-122"/>
-                <a:cs typeface="Calibri" pitchFamily="34" charset="-120"/>
-              </a:rPr>
-              <a:t>Bring your own rules</a:t>
-            </a:r>
-            <a:endParaRPr lang="en-US" sz="1000" dirty="0"/>
-          </a:p>
-          <a:p>
-            <a:pPr marL="342900" indent="-342900">
-              <a:spcAft>
-                <a:spcPts val="300"/>
-              </a:spcAft>
-              <a:buSzPct val="100000"/>
-              <a:buChar char="•"/>
-            </a:pPr>
-            <a:r>
-              <a:rPr lang="en-US" sz="1000" dirty="0">
-                <a:solidFill>
-                  <a:srgbClr val="FFFFFF"/>
-                </a:solidFill>
-                <a:latin typeface="Calibri" pitchFamily="34" charset="0"/>
-                <a:ea typeface="Calibri" pitchFamily="34" charset="-122"/>
-                <a:cs typeface="Calibri" pitchFamily="34" charset="-120"/>
-              </a:rPr>
-              <a:t>Debate can only raise caution</a:t>
-            </a:r>
-            <a:endParaRPr lang="en-US" sz="1000" dirty="0"/>
-          </a:p>
-        </p:txBody>
-      </p:sp>
-      <p:sp>
-        <p:nvSpPr>
-          <p:cNvPr id="10" name="Shape 8"/>
-          <p:cNvSpPr/>
-          <p:nvPr/>
-        </p:nvSpPr>
-        <p:spPr>
-          <a:xfrm>
-            <a:off x="5943600" y="1371600"/>
-            <a:ext cx="2743200" cy="2240280"/>
-          </a:xfrm>
-          <a:prstGeom prst="roundRect">
-            <a:avLst>
-              <a:gd name="adj" fmla="val 3265"/>
-            </a:avLst>
-          </a:prstGeom>
-          <a:solidFill>
-            <a:srgbClr val="FFFFFF"/>
-          </a:solidFill>
-          <a:ln w="9525">
-            <a:solidFill>
-              <a:srgbClr val="D5E2DF"/>
-            </a:solidFill>
-            <a:prstDash val="solid"/>
-          </a:ln>
-          <a:effectLst>
-            <a:outerShdw sx="100000" sy="100000" kx="0" ky="0" algn="bl" rotWithShape="0" blurRad="101600" dist="25400" dir="5400000">
-              <a:srgbClr val="000000">
-                <a:alpha val="12000"/>
-              </a:srgbClr>
-            </a:outerShdw>
-          </a:effectLst>
-        </p:spPr>
-      </p:sp>
-      <p:sp>
-        <p:nvSpPr>
-          <p:cNvPr id="11" name="Text 9"/>
-          <p:cNvSpPr txBox="1"/>
-          <p:nvPr/>
-        </p:nvSpPr>
-        <p:spPr>
-          <a:xfrm>
-            <a:off x="6126480" y="1481328"/>
-            <a:ext cx="2377440" cy="274320"/>
-          </a:xfrm>
-          <a:prstGeom prst="rect">
-            <a:avLst/>
-          </a:prstGeom>
-          <a:noFill/>
-          <a:ln/>
-        </p:spPr>
-        <p:txBody>
-          <a:bodyPr wrap="square" lIns="0" tIns="0" rIns="0" bIns="0" rtlCol="0" anchor="t"/>
-          <a:lstStyle/>
-          <a:p>
-            <a:pPr indent="0" marL="0">
-              <a:buNone/>
-            </a:pPr>
-            <a:r>
-              <a:rPr lang="en-US" sz="1050" b="1" spc="150" kern="0" dirty="0">
-                <a:solidFill>
-                  <a:srgbClr val="5B6B6A"/>
-                </a:solidFill>
-                <a:latin typeface="Calibri" pitchFamily="34" charset="0"/>
-                <a:ea typeface="Calibri" pitchFamily="34" charset="-122"/>
-                <a:cs typeface="Calibri" pitchFamily="34" charset="-120"/>
-              </a:rPr>
-              <a:t>SERVES</a:t>
-            </a:r>
-            <a:endParaRPr lang="en-US" sz="1050" dirty="0"/>
-          </a:p>
-        </p:txBody>
-      </p:sp>
-      <p:sp>
-        <p:nvSpPr>
-          <p:cNvPr id="12" name="Text 10"/>
-          <p:cNvSpPr txBox="1"/>
-          <p:nvPr/>
-        </p:nvSpPr>
-        <p:spPr>
-          <a:xfrm>
-            <a:off x="6126480" y="1783080"/>
-            <a:ext cx="2377440" cy="1737360"/>
-          </a:xfrm>
-          <a:prstGeom prst="rect">
-            <a:avLst/>
-          </a:prstGeom>
-          <a:noFill/>
-          <a:ln/>
-        </p:spPr>
-        <p:txBody>
-          <a:bodyPr wrap="square" lIns="0" tIns="0" rIns="0" bIns="0" rtlCol="0" anchor="t"/>
-          <a:lstStyle/>
-          <a:p>
-            <a:pPr marL="342900" indent="-342900">
-              <a:spcAft>
-                <a:spcPts val="300"/>
-              </a:spcAft>
-              <a:buSzPct val="100000"/>
-              <a:buChar char="•"/>
-            </a:pPr>
-            <a:r>
-              <a:rPr lang="en-US" sz="1000" dirty="0">
-                <a:solidFill>
-                  <a:srgbClr val="1B2424"/>
-                </a:solidFill>
-                <a:latin typeface="Calibri" pitchFamily="34" charset="0"/>
-                <a:ea typeface="Calibri" pitchFamily="34" charset="-122"/>
-                <a:cs typeface="Calibri" pitchFamily="34" charset="-120"/>
-              </a:rPr>
-              <a:t>Next.js 16, React 19, TypeScript</a:t>
-            </a:r>
-            <a:endParaRPr lang="en-US" sz="1000" dirty="0"/>
-          </a:p>
-          <a:p>
-            <a:pPr marL="342900" indent="-342900">
-              <a:spcAft>
-                <a:spcPts val="300"/>
-              </a:spcAft>
-              <a:buSzPct val="100000"/>
-              <a:buChar char="•"/>
-            </a:pPr>
-            <a:r>
-              <a:rPr lang="en-US" sz="1000" dirty="0">
-                <a:solidFill>
-                  <a:srgbClr val="1B2424"/>
-                </a:solidFill>
-                <a:latin typeface="Calibri" pitchFamily="34" charset="0"/>
-                <a:ea typeface="Calibri" pitchFamily="34" charset="-122"/>
-                <a:cs typeface="Calibri" pitchFamily="34" charset="-120"/>
-              </a:rPr>
-              <a:t>Public API with keys and limits</a:t>
-            </a:r>
-            <a:endParaRPr lang="en-US" sz="1000" dirty="0"/>
-          </a:p>
-          <a:p>
-            <a:pPr marL="342900" indent="-342900">
-              <a:spcAft>
-                <a:spcPts val="300"/>
-              </a:spcAft>
-              <a:buSzPct val="100000"/>
-              <a:buChar char="•"/>
-            </a:pPr>
-            <a:r>
-              <a:rPr lang="en-US" sz="1000" dirty="0">
-                <a:solidFill>
-                  <a:srgbClr val="1B2424"/>
-                </a:solidFill>
-                <a:latin typeface="Calibri" pitchFamily="34" charset="0"/>
-                <a:ea typeface="Calibri" pitchFamily="34" charset="-122"/>
-                <a:cs typeface="Calibri" pitchFamily="34" charset="-120"/>
-              </a:rPr>
-              <a:t>RFC 9457 errors, playground</a:t>
-            </a:r>
-            <a:endParaRPr lang="en-US" sz="1000" dirty="0"/>
-          </a:p>
-          <a:p>
-            <a:pPr marL="342900" indent="-342900">
-              <a:spcAft>
-                <a:spcPts val="300"/>
-              </a:spcAft>
-              <a:buSzPct val="100000"/>
-              <a:buChar char="•"/>
-            </a:pPr>
-            <a:r>
-              <a:rPr lang="en-US" sz="1000" dirty="0">
-                <a:solidFill>
-                  <a:srgbClr val="1B2424"/>
-                </a:solidFill>
-                <a:latin typeface="Calibri" pitchFamily="34" charset="0"/>
-                <a:ea typeface="Calibri" pitchFamily="34" charset="-122"/>
-                <a:cs typeface="Calibri" pitchFamily="34" charset="-120"/>
-              </a:rPr>
-              <a:t>Data stays in the browser</a:t>
-            </a:r>
-            <a:endParaRPr lang="en-US" sz="1000" dirty="0"/>
-          </a:p>
-        </p:txBody>
-      </p:sp>
-      <p:sp>
-        <p:nvSpPr>
-          <p:cNvPr id="13" name="Shape 11"/>
-          <p:cNvSpPr/>
-          <p:nvPr/>
-        </p:nvSpPr>
-        <p:spPr>
-          <a:xfrm>
-            <a:off x="457200" y="3794760"/>
-            <a:ext cx="1920240" cy="777240"/>
-          </a:xfrm>
-          <a:prstGeom prst="roundRect">
-            <a:avLst>
-              <a:gd name="adj" fmla="val 9412"/>
-            </a:avLst>
-          </a:prstGeom>
-          <a:solidFill>
-            <a:srgbClr val="FBF1DF"/>
-          </a:solidFill>
-          <a:ln w="9525">
-            <a:solidFill>
-              <a:srgbClr val="FBF1DF"/>
-            </a:solidFill>
-            <a:prstDash val="solid"/>
-          </a:ln>
-          <a:effectLst>
-            <a:outerShdw sx="100000" sy="100000" kx="0" ky="0" algn="bl" rotWithShape="0" blurRad="101600" dist="25400" dir="5400000">
-              <a:srgbClr val="000000">
-                <a:alpha val="12000"/>
-              </a:srgbClr>
-            </a:outerShdw>
-          </a:effectLst>
-        </p:spPr>
-      </p:sp>
-      <p:sp>
-        <p:nvSpPr>
-          <p:cNvPr id="14" name="Text 12"/>
-          <p:cNvSpPr txBox="1"/>
-          <p:nvPr/>
-        </p:nvSpPr>
-        <p:spPr>
-          <a:xfrm>
-            <a:off x="594360" y="3877056"/>
-            <a:ext cx="1737360" cy="320040"/>
-          </a:xfrm>
-          <a:prstGeom prst="rect">
-            <a:avLst/>
-          </a:prstGeom>
-          <a:noFill/>
-          <a:ln/>
-        </p:spPr>
-        <p:txBody>
-          <a:bodyPr wrap="square" lIns="0" tIns="0" rIns="0" bIns="0" rtlCol="0" anchor="t"/>
-          <a:lstStyle/>
-          <a:p>
-            <a:pPr indent="0" marL="0">
-              <a:buNone/>
-            </a:pPr>
-            <a:r>
-              <a:rPr lang="en-US" sz="1700" b="1" dirty="0">
-                <a:solidFill>
-                  <a:srgbClr val="0F3D3E"/>
-                </a:solidFill>
-                <a:latin typeface="Cambria" pitchFamily="34" charset="0"/>
-                <a:ea typeface="Cambria" pitchFamily="34" charset="-122"/>
-                <a:cs typeface="Cambria" pitchFamily="34" charset="-120"/>
-              </a:rPr>
-              <a:t>23</a:t>
-            </a:r>
-            <a:endParaRPr lang="en-US" sz="1700" dirty="0"/>
-          </a:p>
-        </p:txBody>
-      </p:sp>
-      <p:sp>
-        <p:nvSpPr>
-          <p:cNvPr id="15" name="Text 13"/>
-          <p:cNvSpPr txBox="1"/>
-          <p:nvPr/>
-        </p:nvSpPr>
-        <p:spPr>
-          <a:xfrm>
-            <a:off x="594360" y="4206240"/>
-            <a:ext cx="1737360" cy="274320"/>
-          </a:xfrm>
-          <a:prstGeom prst="rect">
-            <a:avLst/>
-          </a:prstGeom>
-          <a:noFill/>
-          <a:ln/>
-        </p:spPr>
-        <p:txBody>
-          <a:bodyPr wrap="square" lIns="0" tIns="0" rIns="0" bIns="0" rtlCol="0" anchor="t"/>
-          <a:lstStyle/>
-          <a:p>
-            <a:pPr indent="0" marL="0">
-              <a:buNone/>
-            </a:pPr>
-            <a:r>
-              <a:rPr lang="en-US" sz="950" dirty="0">
-                <a:solidFill>
-                  <a:srgbClr val="1B2424"/>
-                </a:solidFill>
-                <a:latin typeface="Calibri" pitchFamily="34" charset="0"/>
-                <a:ea typeface="Calibri" pitchFamily="34" charset="-122"/>
-                <a:cs typeface="Calibri" pitchFamily="34" charset="-120"/>
-              </a:rPr>
-              <a:t>automated tests</a:t>
-            </a:r>
-            <a:endParaRPr lang="en-US" sz="950" dirty="0"/>
-          </a:p>
-        </p:txBody>
-      </p:sp>
-      <p:sp>
-        <p:nvSpPr>
-          <p:cNvPr id="16" name="Shape 14"/>
-          <p:cNvSpPr/>
-          <p:nvPr/>
-        </p:nvSpPr>
-        <p:spPr>
-          <a:xfrm>
-            <a:off x="2542032" y="3794760"/>
-            <a:ext cx="1920240" cy="777240"/>
-          </a:xfrm>
-          <a:prstGeom prst="roundRect">
-            <a:avLst>
-              <a:gd name="adj" fmla="val 9412"/>
-            </a:avLst>
-          </a:prstGeom>
-          <a:solidFill>
-            <a:srgbClr val="FBF1DF"/>
-          </a:solidFill>
-          <a:ln w="9525">
-            <a:solidFill>
-              <a:srgbClr val="FBF1DF"/>
-            </a:solidFill>
-            <a:prstDash val="solid"/>
-          </a:ln>
-          <a:effectLst>
-            <a:outerShdw sx="100000" sy="100000" kx="0" ky="0" algn="bl" rotWithShape="0" blurRad="101600" dist="25400" dir="5400000">
-              <a:srgbClr val="000000">
-                <a:alpha val="12000"/>
-              </a:srgbClr>
-            </a:outerShdw>
-          </a:effectLst>
-        </p:spPr>
-      </p:sp>
-      <p:sp>
-        <p:nvSpPr>
-          <p:cNvPr id="17" name="Text 15"/>
-          <p:cNvSpPr txBox="1"/>
-          <p:nvPr/>
-        </p:nvSpPr>
-        <p:spPr>
-          <a:xfrm>
-            <a:off x="2679192" y="3877056"/>
-            <a:ext cx="1737360" cy="320040"/>
-          </a:xfrm>
-          <a:prstGeom prst="rect">
-            <a:avLst/>
-          </a:prstGeom>
-          <a:noFill/>
-          <a:ln/>
-        </p:spPr>
-        <p:txBody>
-          <a:bodyPr wrap="square" lIns="0" tIns="0" rIns="0" bIns="0" rtlCol="0" anchor="t"/>
-          <a:lstStyle/>
-          <a:p>
-            <a:pPr indent="0" marL="0">
-              <a:buNone/>
-            </a:pPr>
-            <a:r>
-              <a:rPr lang="en-US" sz="1700" b="1" dirty="0">
-                <a:solidFill>
-                  <a:srgbClr val="0F3D3E"/>
-                </a:solidFill>
-                <a:latin typeface="Cambria" pitchFamily="34" charset="0"/>
-                <a:ea typeface="Cambria" pitchFamily="34" charset="-122"/>
-                <a:cs typeface="Cambria" pitchFamily="34" charset="-120"/>
-              </a:rPr>
-              <a:t>0</a:t>
-            </a:r>
-            <a:endParaRPr lang="en-US" sz="1700" dirty="0"/>
-          </a:p>
-        </p:txBody>
-      </p:sp>
-      <p:sp>
-        <p:nvSpPr>
-          <p:cNvPr id="18" name="Text 16"/>
-          <p:cNvSpPr txBox="1"/>
-          <p:nvPr/>
-        </p:nvSpPr>
-        <p:spPr>
-          <a:xfrm>
-            <a:off x="2679192" y="4206240"/>
-            <a:ext cx="1737360" cy="274320"/>
-          </a:xfrm>
-          <a:prstGeom prst="rect">
-            <a:avLst/>
-          </a:prstGeom>
-          <a:noFill/>
-          <a:ln/>
-        </p:spPr>
-        <p:txBody>
-          <a:bodyPr wrap="square" lIns="0" tIns="0" rIns="0" bIns="0" rtlCol="0" anchor="t"/>
-          <a:lstStyle/>
-          <a:p>
-            <a:pPr indent="0" marL="0">
-              <a:buNone/>
-            </a:pPr>
-            <a:r>
-              <a:rPr lang="en-US" sz="950" dirty="0">
-                <a:solidFill>
-                  <a:srgbClr val="1B2424"/>
-                </a:solidFill>
-                <a:latin typeface="Calibri" pitchFamily="34" charset="0"/>
-                <a:ea typeface="Calibri" pitchFamily="34" charset="-122"/>
-                <a:cs typeface="Calibri" pitchFamily="34" charset="-120"/>
-              </a:rPr>
-              <a:t>serious axe violations</a:t>
-            </a:r>
-            <a:endParaRPr lang="en-US" sz="950" dirty="0"/>
-          </a:p>
-        </p:txBody>
-      </p:sp>
-      <p:sp>
-        <p:nvSpPr>
-          <p:cNvPr id="19" name="Shape 17"/>
-          <p:cNvSpPr/>
-          <p:nvPr/>
-        </p:nvSpPr>
-        <p:spPr>
-          <a:xfrm>
-            <a:off x="4626864" y="3794760"/>
-            <a:ext cx="1920240" cy="777240"/>
-          </a:xfrm>
-          <a:prstGeom prst="roundRect">
-            <a:avLst>
-              <a:gd name="adj" fmla="val 9412"/>
-            </a:avLst>
-          </a:prstGeom>
-          <a:solidFill>
-            <a:srgbClr val="FBF1DF"/>
-          </a:solidFill>
-          <a:ln w="9525">
-            <a:solidFill>
-              <a:srgbClr val="FBF1DF"/>
-            </a:solidFill>
-            <a:prstDash val="solid"/>
-          </a:ln>
-          <a:effectLst>
-            <a:outerShdw sx="100000" sy="100000" kx="0" ky="0" algn="bl" rotWithShape="0" blurRad="101600" dist="25400" dir="5400000">
-              <a:srgbClr val="000000">
-                <a:alpha val="12000"/>
-              </a:srgbClr>
-            </a:outerShdw>
-          </a:effectLst>
-        </p:spPr>
-      </p:sp>
-      <p:sp>
-        <p:nvSpPr>
-          <p:cNvPr id="20" name="Text 18"/>
-          <p:cNvSpPr txBox="1"/>
-          <p:nvPr/>
-        </p:nvSpPr>
-        <p:spPr>
-          <a:xfrm>
-            <a:off x="4764024" y="3877056"/>
-            <a:ext cx="1737360" cy="320040"/>
-          </a:xfrm>
-          <a:prstGeom prst="rect">
-            <a:avLst/>
-          </a:prstGeom>
-          <a:noFill/>
-          <a:ln/>
-        </p:spPr>
-        <p:txBody>
-          <a:bodyPr wrap="square" lIns="0" tIns="0" rIns="0" bIns="0" rtlCol="0" anchor="t"/>
-          <a:lstStyle/>
-          <a:p>
-            <a:pPr indent="0" marL="0">
-              <a:buNone/>
-            </a:pPr>
-            <a:r>
-              <a:rPr lang="en-US" sz="1700" b="1" dirty="0">
-                <a:solidFill>
-                  <a:srgbClr val="0F3D3E"/>
-                </a:solidFill>
-                <a:latin typeface="Cambria" pitchFamily="34" charset="0"/>
-                <a:ea typeface="Cambria" pitchFamily="34" charset="-122"/>
-                <a:cs typeface="Cambria" pitchFamily="34" charset="-120"/>
-              </a:rPr>
-              <a:t>99 / 100</a:t>
-            </a:r>
-            <a:endParaRPr lang="en-US" sz="1700" dirty="0"/>
-          </a:p>
-        </p:txBody>
-      </p:sp>
-      <p:sp>
-        <p:nvSpPr>
-          <p:cNvPr id="21" name="Text 19"/>
-          <p:cNvSpPr txBox="1"/>
-          <p:nvPr/>
-        </p:nvSpPr>
-        <p:spPr>
-          <a:xfrm>
-            <a:off x="4764024" y="4206240"/>
-            <a:ext cx="1737360" cy="274320"/>
-          </a:xfrm>
-          <a:prstGeom prst="rect">
-            <a:avLst/>
-          </a:prstGeom>
-          <a:noFill/>
-          <a:ln/>
-        </p:spPr>
-        <p:txBody>
-          <a:bodyPr wrap="square" lIns="0" tIns="0" rIns="0" bIns="0" rtlCol="0" anchor="t"/>
-          <a:lstStyle/>
-          <a:p>
-            <a:pPr indent="0" marL="0">
-              <a:buNone/>
-            </a:pPr>
-            <a:r>
-              <a:rPr lang="en-US" sz="950" dirty="0">
-                <a:solidFill>
-                  <a:srgbClr val="1B2424"/>
-                </a:solidFill>
-                <a:latin typeface="Calibri" pitchFamily="34" charset="0"/>
-                <a:ea typeface="Calibri" pitchFamily="34" charset="-122"/>
-                <a:cs typeface="Calibri" pitchFamily="34" charset="-120"/>
-              </a:rPr>
-              <a:t>Lighthouse perf / a11y</a:t>
-            </a:r>
-            <a:endParaRPr lang="en-US" sz="950" dirty="0"/>
-          </a:p>
-        </p:txBody>
-      </p:sp>
-      <p:sp>
-        <p:nvSpPr>
-          <p:cNvPr id="22" name="Shape 20"/>
-          <p:cNvSpPr/>
-          <p:nvPr/>
-        </p:nvSpPr>
-        <p:spPr>
-          <a:xfrm>
-            <a:off x="6711696" y="3794760"/>
-            <a:ext cx="1920240" cy="777240"/>
-          </a:xfrm>
-          <a:prstGeom prst="roundRect">
-            <a:avLst>
-              <a:gd name="adj" fmla="val 9412"/>
-            </a:avLst>
-          </a:prstGeom>
-          <a:solidFill>
-            <a:srgbClr val="FBF1DF"/>
-          </a:solidFill>
-          <a:ln w="9525">
-            <a:solidFill>
-              <a:srgbClr val="FBF1DF"/>
-            </a:solidFill>
-            <a:prstDash val="solid"/>
-          </a:ln>
-          <a:effectLst>
-            <a:outerShdw sx="100000" sy="100000" kx="0" ky="0" algn="bl" rotWithShape="0" blurRad="101600" dist="25400" dir="5400000">
-              <a:srgbClr val="000000">
-                <a:alpha val="12000"/>
-              </a:srgbClr>
-            </a:outerShdw>
-          </a:effectLst>
-        </p:spPr>
-      </p:sp>
-      <p:sp>
-        <p:nvSpPr>
-          <p:cNvPr id="23" name="Text 21"/>
-          <p:cNvSpPr txBox="1"/>
-          <p:nvPr/>
-        </p:nvSpPr>
-        <p:spPr>
-          <a:xfrm>
-            <a:off x="6848856" y="3877056"/>
-            <a:ext cx="1737360" cy="320040"/>
-          </a:xfrm>
-          <a:prstGeom prst="rect">
-            <a:avLst/>
-          </a:prstGeom>
-          <a:noFill/>
-          <a:ln/>
-        </p:spPr>
-        <p:txBody>
-          <a:bodyPr wrap="square" lIns="0" tIns="0" rIns="0" bIns="0" rtlCol="0" anchor="t"/>
-          <a:lstStyle/>
-          <a:p>
-            <a:pPr indent="0" marL="0">
-              <a:buNone/>
-            </a:pPr>
-            <a:r>
-              <a:rPr lang="en-US" sz="1700" b="1" dirty="0">
-                <a:solidFill>
-                  <a:srgbClr val="0F3D3E"/>
-                </a:solidFill>
-                <a:latin typeface="Cambria" pitchFamily="34" charset="0"/>
-                <a:ea typeface="Cambria" pitchFamily="34" charset="-122"/>
-                <a:cs typeface="Cambria" pitchFamily="34" charset="-120"/>
-              </a:rPr>
-              <a:t>about ₹16</a:t>
-            </a:r>
-            <a:endParaRPr lang="en-US" sz="1700" dirty="0"/>
-          </a:p>
-        </p:txBody>
-      </p:sp>
-      <p:sp>
-        <p:nvSpPr>
-          <p:cNvPr id="24" name="Text 22"/>
-          <p:cNvSpPr txBox="1"/>
-          <p:nvPr/>
-        </p:nvSpPr>
-        <p:spPr>
-          <a:xfrm>
-            <a:off x="6848856" y="4206240"/>
-            <a:ext cx="1737360" cy="274320"/>
-          </a:xfrm>
-          <a:prstGeom prst="rect">
-            <a:avLst/>
-          </a:prstGeom>
-          <a:noFill/>
-          <a:ln/>
-        </p:spPr>
-        <p:txBody>
-          <a:bodyPr wrap="square" lIns="0" tIns="0" rIns="0" bIns="0" rtlCol="0" anchor="t"/>
-          <a:lstStyle/>
-          <a:p>
-            <a:pPr indent="0" marL="0">
-              <a:buNone/>
-            </a:pPr>
-            <a:r>
-              <a:rPr lang="en-US" sz="950" dirty="0">
-                <a:solidFill>
-                  <a:srgbClr val="1B2424"/>
-                </a:solidFill>
-                <a:latin typeface="Calibri" pitchFamily="34" charset="0"/>
-                <a:ea typeface="Calibri" pitchFamily="34" charset="-122"/>
-                <a:cs typeface="Calibri" pitchFamily="34" charset="-120"/>
-              </a:rPr>
-              <a:t>AI cost per claim</a:t>
-            </a:r>
-            <a:endParaRPr lang="en-US" sz="950" dirty="0"/>
-          </a:p>
-        </p:txBody>
-      </p:sp>
-    </p:spTree>
-  </p:cSld>
-  <p:clrMapOvr>
-    <a:masterClrMapping/>
-  </p:clrMapOvr>
-</p:sld>
-</file>
-
-<file path=ppt/slides/slide8.xml><?xml version="1.0" encoding="utf-8"?>
-<p:sld xmlns:a="http://schemas.openxmlformats.org/drawingml/2006/main" xmlns:r="http://schemas.openxmlformats.org/officeDocument/2006/relationships" xmlns:p="http://schemas.openxmlformats.org/presentationml/2006/main">
-  <p:cSld name="Slide 8">
-    <p:bg>
-      <p:bgPr>
-        <a:solidFill>
-          <a:srgbClr val="E6F0EE"/>
-        </a:solidFill>
-      </p:bgPr>
-    </p:bg>
-    <p:spTree>
-      <p:nvGrpSpPr>
-        <p:cNvPr id="1" name=""/>
-        <p:cNvGrpSpPr/>
-        <p:nvPr/>
-      </p:nvGrpSpPr>
-      <p:grpSpPr>
-        <a:xfrm>
-          <a:off x="0" y="0"/>
-          <a:ext cx="0" cy="0"/>
-          <a:chOff x="0" y="0"/>
-          <a:chExt cx="0" cy="0"/>
-        </a:xfrm>
-      </p:grpSpPr>
-      <p:sp>
-        <p:nvSpPr>
-          <p:cNvPr id="2" name="Text 0"/>
-          <p:cNvSpPr txBox="1"/>
-          <p:nvPr/>
-        </p:nvSpPr>
-        <p:spPr>
-          <a:xfrm>
-            <a:off x="457200" y="256032"/>
-            <a:ext cx="7315200" cy="274320"/>
-          </a:xfrm>
-          <a:prstGeom prst="rect">
-            <a:avLst/>
-          </a:prstGeom>
-          <a:noFill/>
-          <a:ln/>
-        </p:spPr>
-        <p:txBody>
-          <a:bodyPr wrap="square" lIns="0" tIns="0" rIns="0" bIns="0" rtlCol="0" anchor="ctr"/>
-          <a:lstStyle/>
-          <a:p>
-            <a:pPr indent="0" marL="0">
-              <a:buNone/>
-            </a:pPr>
-            <a:r>
-              <a:rPr lang="en-US" sz="1100" b="1" spc="200" kern="0" dirty="0">
-                <a:solidFill>
-                  <a:srgbClr val="E3A33B"/>
-                </a:solidFill>
-                <a:latin typeface="Calibri" pitchFamily="34" charset="0"/>
-                <a:ea typeface="Calibri" pitchFamily="34" charset="-122"/>
-                <a:cs typeface="Calibri" pitchFamily="34" charset="-120"/>
-              </a:rPr>
-              <a:t>04  ·  TECHNICAL IMPLEMENTATION: MEASURED, NOT CLAIMED</a:t>
-            </a:r>
-            <a:endParaRPr lang="en-US" sz="1100" dirty="0"/>
-          </a:p>
-        </p:txBody>
-      </p:sp>
-      <p:sp>
-        <p:nvSpPr>
-          <p:cNvPr id="3" name="Text 1"/>
-          <p:cNvSpPr txBox="1"/>
-          <p:nvPr/>
-        </p:nvSpPr>
-        <p:spPr>
-          <a:xfrm>
-            <a:off x="457200" y="530352"/>
-            <a:ext cx="8229600" cy="731520"/>
-          </a:xfrm>
-          <a:prstGeom prst="rect">
-            <a:avLst/>
-          </a:prstGeom>
-          <a:noFill/>
-          <a:ln/>
-        </p:spPr>
-        <p:txBody>
-          <a:bodyPr wrap="square" lIns="0" tIns="0" rIns="0" bIns="0" rtlCol="0" anchor="t"/>
-          <a:lstStyle/>
-          <a:p>
-            <a:pPr indent="0" marL="0">
-              <a:buNone/>
-            </a:pPr>
-            <a:r>
-              <a:rPr lang="en-US" sz="2400" b="1" dirty="0">
-                <a:solidFill>
-                  <a:srgbClr val="1B2424"/>
-                </a:solidFill>
-                <a:latin typeface="Cambria" pitchFamily="34" charset="0"/>
-                <a:ea typeface="Cambria" pitchFamily="34" charset="-122"/>
-                <a:cs typeface="Cambria" pitchFamily="34" charset="-120"/>
-              </a:rPr>
-              <a:t>Built for a cheap phone, in your language</a:t>
-            </a:r>
-            <a:endParaRPr lang="en-US" sz="2400" dirty="0"/>
-          </a:p>
-        </p:txBody>
-      </p:sp>
-      <p:sp>
-        <p:nvSpPr>
-          <p:cNvPr id="4" name="Shape 2"/>
-          <p:cNvSpPr/>
-          <p:nvPr/>
-        </p:nvSpPr>
-        <p:spPr>
-          <a:xfrm>
-            <a:off x="420624" y="1335024"/>
-            <a:ext cx="4005072" cy="2267712"/>
-          </a:xfrm>
-          <a:prstGeom prst="roundRect">
-            <a:avLst>
-              <a:gd name="adj" fmla="val 2419"/>
+              <a:gd name="adj" fmla="val 1887"/>
             </a:avLst>
           </a:prstGeom>
           <a:solidFill>
@@ -9990,8 +10263,8 @@
         </p:blipFill>
         <p:spPr>
           <a:xfrm>
-            <a:off x="457200" y="1371600"/>
-            <a:ext cx="3931920" cy="2194560"/>
+            <a:off x="457200" y="1325880"/>
+            <a:ext cx="4023360" cy="2834640"/>
           </a:xfrm>
           <a:prstGeom prst="rect">
             <a:avLst/>
@@ -10006,12 +10279,12 @@
         </p:nvSpPr>
         <p:spPr>
           <a:xfrm>
-            <a:off x="4718304" y="1335024"/>
-            <a:ext cx="1490472" cy="3136392"/>
+            <a:off x="4626864" y="1289304"/>
+            <a:ext cx="4096512" cy="2907792"/>
           </a:xfrm>
           <a:prstGeom prst="roundRect">
             <a:avLst>
-              <a:gd name="adj" fmla="val 3681"/>
+              <a:gd name="adj" fmla="val 1887"/>
             </a:avLst>
           </a:prstGeom>
           <a:solidFill>
@@ -10048,8 +10321,8 @@
         </p:blipFill>
         <p:spPr>
           <a:xfrm>
-            <a:off x="4754880" y="1371600"/>
-            <a:ext cx="1417320" cy="3063240"/>
+            <a:off x="4663440" y="1325880"/>
+            <a:ext cx="4023360" cy="2834640"/>
           </a:xfrm>
           <a:prstGeom prst="rect">
             <a:avLst/>
@@ -10064,34 +10337,34 @@
         </p:nvSpPr>
         <p:spPr>
           <a:xfrm>
-            <a:off x="6446520" y="1371600"/>
-            <a:ext cx="2286000" cy="228600"/>
-          </a:xfrm>
-          <a:prstGeom prst="rect">
-            <a:avLst/>
-          </a:prstGeom>
-          <a:noFill/>
-          <a:ln/>
-        </p:spPr>
-        <p:txBody>
-          <a:bodyPr wrap="square" lIns="0" tIns="0" rIns="0" bIns="0" rtlCol="0" anchor="t"/>
-          <a:lstStyle/>
-          <a:p>
-            <a:pPr indent="0" marL="0">
-              <a:buNone/>
-            </a:pPr>
-            <a:r>
-              <a:rPr lang="en-US" sz="1050" b="1" dirty="0">
-                <a:solidFill>
-                  <a:srgbClr val="0F3D3E"/>
-                </a:solidFill>
-                <a:latin typeface="Calibri" pitchFamily="34" charset="0"/>
-                <a:ea typeface="Calibri" pitchFamily="34" charset="-122"/>
-                <a:cs typeface="Calibri" pitchFamily="34" charset="-120"/>
-              </a:rPr>
-              <a:t>Accessibility (axe, WCAG 2.2 AA)</a:t>
-            </a:r>
-            <a:endParaRPr lang="en-US" sz="1050" dirty="0"/>
+            <a:off x="457200" y="4224528"/>
+            <a:ext cx="4023360" cy="548640"/>
+          </a:xfrm>
+          <a:prstGeom prst="rect">
+            <a:avLst/>
+          </a:prstGeom>
+          <a:noFill/>
+          <a:ln/>
+        </p:spPr>
+        <p:txBody>
+          <a:bodyPr wrap="square" lIns="0" tIns="0" rIns="0" bIns="0" rtlCol="0" anchor="t"/>
+          <a:lstStyle/>
+          <a:p>
+            <a:pPr indent="0" marL="0">
+              <a:buNone/>
+            </a:pPr>
+            <a:r>
+              <a:rPr lang="en-US" sz="1000" dirty="0">
+                <a:solidFill>
+                  <a:srgbClr val="5B6B6A"/>
+                </a:solidFill>
+                <a:latin typeface="Calibri" pitchFamily="34" charset="0"/>
+                <a:ea typeface="Calibri" pitchFamily="34" charset="-122"/>
+                <a:cs typeface="Calibri" pitchFamily="34" charset="-120"/>
+              </a:rPr>
+              <a:t>Find: three sample papers and the tax statement become a list of ₹4.85 lakh waiting in 5 places, each with its own portal and guided steps.</a:t>
+            </a:r>
+            <a:endParaRPr lang="en-US" sz="1000" dirty="0"/>
           </a:p>
         </p:txBody>
       </p:sp>
@@ -10103,281 +10376,8 @@
         </p:nvSpPr>
         <p:spPr>
           <a:xfrm>
-            <a:off x="6446520" y="1591056"/>
-            <a:ext cx="2286000" cy="566928"/>
-          </a:xfrm>
-          <a:prstGeom prst="rect">
-            <a:avLst/>
-          </a:prstGeom>
-          <a:noFill/>
-          <a:ln/>
-        </p:spPr>
-        <p:txBody>
-          <a:bodyPr wrap="square" lIns="0" tIns="0" rIns="0" bIns="0" rtlCol="0" anchor="t"/>
-          <a:lstStyle/>
-          <a:p>
-            <a:pPr indent="0" marL="0">
-              <a:buNone/>
-            </a:pPr>
-            <a:r>
-              <a:rPr lang="en-US" sz="850" dirty="0">
-                <a:solidFill>
-                  <a:srgbClr val="1B2424"/>
-                </a:solidFill>
-                <a:latin typeface="Calibri" pitchFamily="34" charset="0"/>
-                <a:ea typeface="Calibri" pitchFamily="34" charset="-122"/>
-                <a:cs typeface="Calibri" pitchFamily="34" charset="-120"/>
-              </a:rPr>
-              <a:t>0 serious or critical across 11 pages, light and dark</a:t>
-            </a:r>
-            <a:endParaRPr lang="en-US" sz="850" dirty="0"/>
-          </a:p>
-        </p:txBody>
-      </p:sp>
-      <p:sp>
-        <p:nvSpPr>
-          <p:cNvPr id="10" name="Text 6"/>
-          <p:cNvSpPr txBox="1"/>
-          <p:nvPr/>
-        </p:nvSpPr>
-        <p:spPr>
-          <a:xfrm>
-            <a:off x="6446520" y="2148840"/>
-            <a:ext cx="2286000" cy="228600"/>
-          </a:xfrm>
-          <a:prstGeom prst="rect">
-            <a:avLst/>
-          </a:prstGeom>
-          <a:noFill/>
-          <a:ln/>
-        </p:spPr>
-        <p:txBody>
-          <a:bodyPr wrap="square" lIns="0" tIns="0" rIns="0" bIns="0" rtlCol="0" anchor="t"/>
-          <a:lstStyle/>
-          <a:p>
-            <a:pPr indent="0" marL="0">
-              <a:buNone/>
-            </a:pPr>
-            <a:r>
-              <a:rPr lang="en-US" sz="1050" b="1" dirty="0">
-                <a:solidFill>
-                  <a:srgbClr val="0F3D3E"/>
-                </a:solidFill>
-                <a:latin typeface="Calibri" pitchFamily="34" charset="0"/>
-                <a:ea typeface="Calibri" pitchFamily="34" charset="-122"/>
-                <a:cs typeface="Calibri" pitchFamily="34" charset="-120"/>
-              </a:rPr>
-              <a:t>Lighthouse, live, 3 runs each</a:t>
-            </a:r>
-            <a:endParaRPr lang="en-US" sz="1050" dirty="0"/>
-          </a:p>
-        </p:txBody>
-      </p:sp>
-      <p:sp>
-        <p:nvSpPr>
-          <p:cNvPr id="11" name="Text 7"/>
-          <p:cNvSpPr txBox="1"/>
-          <p:nvPr/>
-        </p:nvSpPr>
-        <p:spPr>
-          <a:xfrm>
-            <a:off x="6446520" y="2368296"/>
-            <a:ext cx="2286000" cy="566928"/>
-          </a:xfrm>
-          <a:prstGeom prst="rect">
-            <a:avLst/>
-          </a:prstGeom>
-          <a:noFill/>
-          <a:ln/>
-        </p:spPr>
-        <p:txBody>
-          <a:bodyPr wrap="square" lIns="0" tIns="0" rIns="0" bIns="0" rtlCol="0" anchor="t"/>
-          <a:lstStyle/>
-          <a:p>
-            <a:pPr indent="0" marL="0">
-              <a:buNone/>
-            </a:pPr>
-            <a:r>
-              <a:rPr lang="en-US" sz="850" dirty="0">
-                <a:solidFill>
-                  <a:srgbClr val="1B2424"/>
-                </a:solidFill>
-                <a:latin typeface="Calibri" pitchFamily="34" charset="0"/>
-                <a:ea typeface="Calibri" pitchFamily="34" charset="-122"/>
-                <a:cs typeface="Calibri" pitchFamily="34" charset="-120"/>
-              </a:rPr>
-              <a:t>99 to 100 desktop, never below 90 on a throttled phone. 100 accessibility, best practices and SEO on both, and layout shift under a quarter of the 0.1 threshold.</a:t>
-            </a:r>
-            <a:endParaRPr lang="en-US" sz="850" dirty="0"/>
-          </a:p>
-        </p:txBody>
-      </p:sp>
-      <p:sp>
-        <p:nvSpPr>
-          <p:cNvPr id="12" name="Text 8"/>
-          <p:cNvSpPr txBox="1"/>
-          <p:nvPr/>
-        </p:nvSpPr>
-        <p:spPr>
-          <a:xfrm>
-            <a:off x="6446520" y="2926080"/>
-            <a:ext cx="2286000" cy="228600"/>
-          </a:xfrm>
-          <a:prstGeom prst="rect">
-            <a:avLst/>
-          </a:prstGeom>
-          <a:noFill/>
-          <a:ln/>
-        </p:spPr>
-        <p:txBody>
-          <a:bodyPr wrap="square" lIns="0" tIns="0" rIns="0" bIns="0" rtlCol="0" anchor="t"/>
-          <a:lstStyle/>
-          <a:p>
-            <a:pPr indent="0" marL="0">
-              <a:buNone/>
-            </a:pPr>
-            <a:r>
-              <a:rPr lang="en-US" sz="1050" b="1" dirty="0">
-                <a:solidFill>
-                  <a:srgbClr val="0F3D3E"/>
-                </a:solidFill>
-                <a:latin typeface="Calibri" pitchFamily="34" charset="0"/>
-                <a:ea typeface="Calibri" pitchFamily="34" charset="-122"/>
-                <a:cs typeface="Calibri" pitchFamily="34" charset="-120"/>
-              </a:rPr>
-              <a:t>Works with no signal</a:t>
-            </a:r>
-            <a:endParaRPr lang="en-US" sz="1050" dirty="0"/>
-          </a:p>
-        </p:txBody>
-      </p:sp>
-      <p:sp>
-        <p:nvSpPr>
-          <p:cNvPr id="13" name="Text 9"/>
-          <p:cNvSpPr txBox="1"/>
-          <p:nvPr/>
-        </p:nvSpPr>
-        <p:spPr>
-          <a:xfrm>
-            <a:off x="6446520" y="3145536"/>
-            <a:ext cx="2286000" cy="566928"/>
-          </a:xfrm>
-          <a:prstGeom prst="rect">
-            <a:avLst/>
-          </a:prstGeom>
-          <a:noFill/>
-          <a:ln/>
-        </p:spPr>
-        <p:txBody>
-          <a:bodyPr wrap="square" lIns="0" tIns="0" rIns="0" bIns="0" rtlCol="0" anchor="t"/>
-          <a:lstStyle/>
-          <a:p>
-            <a:pPr indent="0" marL="0">
-              <a:buNone/>
-            </a:pPr>
-            <a:r>
-              <a:rPr lang="en-US" sz="850" dirty="0">
-                <a:solidFill>
-                  <a:srgbClr val="1B2424"/>
-                </a:solidFill>
-                <a:latin typeface="Calibri" pitchFamily="34" charset="0"/>
-                <a:ea typeface="Calibri" pitchFamily="34" charset="-122"/>
-                <a:cs typeface="Calibri" pitchFamily="34" charset="-120"/>
-              </a:rPr>
-              <a:t>Installable. A service worker keeps every opened page, the Vault and the glossary working offline, and says which steps are waiting.</a:t>
-            </a:r>
-            <a:endParaRPr lang="en-US" sz="850" dirty="0"/>
-          </a:p>
-        </p:txBody>
-      </p:sp>
-      <p:sp>
-        <p:nvSpPr>
-          <p:cNvPr id="14" name="Text 10"/>
-          <p:cNvSpPr txBox="1"/>
-          <p:nvPr/>
-        </p:nvSpPr>
-        <p:spPr>
-          <a:xfrm>
-            <a:off x="6446520" y="3703320"/>
-            <a:ext cx="2286000" cy="228600"/>
-          </a:xfrm>
-          <a:prstGeom prst="rect">
-            <a:avLst/>
-          </a:prstGeom>
-          <a:noFill/>
-          <a:ln/>
-        </p:spPr>
-        <p:txBody>
-          <a:bodyPr wrap="square" lIns="0" tIns="0" rIns="0" bIns="0" rtlCol="0" anchor="t"/>
-          <a:lstStyle/>
-          <a:p>
-            <a:pPr indent="0" marL="0">
-              <a:buNone/>
-            </a:pPr>
-            <a:r>
-              <a:rPr lang="en-US" sz="1050" b="1" dirty="0">
-                <a:solidFill>
-                  <a:srgbClr val="0F3D3E"/>
-                </a:solidFill>
-                <a:latin typeface="Calibri" pitchFamily="34" charset="0"/>
-                <a:ea typeface="Calibri" pitchFamily="34" charset="-122"/>
-                <a:cs typeface="Calibri" pitchFamily="34" charset="-120"/>
-              </a:rPr>
-              <a:t>Languages and reach</a:t>
-            </a:r>
-            <a:endParaRPr lang="en-US" sz="1050" dirty="0"/>
-          </a:p>
-        </p:txBody>
-      </p:sp>
-      <p:sp>
-        <p:nvSpPr>
-          <p:cNvPr id="15" name="Text 11"/>
-          <p:cNvSpPr txBox="1"/>
-          <p:nvPr/>
-        </p:nvSpPr>
-        <p:spPr>
-          <a:xfrm>
-            <a:off x="6446520" y="3922776"/>
-            <a:ext cx="2286000" cy="566928"/>
-          </a:xfrm>
-          <a:prstGeom prst="rect">
-            <a:avLst/>
-          </a:prstGeom>
-          <a:noFill/>
-          <a:ln/>
-        </p:spPr>
-        <p:txBody>
-          <a:bodyPr wrap="square" lIns="0" tIns="0" rIns="0" bIns="0" rtlCol="0" anchor="t"/>
-          <a:lstStyle/>
-          <a:p>
-            <a:pPr indent="0" marL="0">
-              <a:buNone/>
-            </a:pPr>
-            <a:r>
-              <a:rPr lang="en-US" sz="850" dirty="0">
-                <a:solidFill>
-                  <a:srgbClr val="1B2424"/>
-                </a:solidFill>
-                <a:latin typeface="Calibri" pitchFamily="34" charset="0"/>
-                <a:ea typeface="Calibri" pitchFamily="34" charset="-122"/>
-                <a:cs typeface="Calibri" pitchFamily="34" charset="-120"/>
-              </a:rPr>
-              <a:t>English and Hindi on every screen including the rule output and the debate. 320 px, 44 px controls, voice in and out, no sign up.</a:t>
-            </a:r>
-            <a:endParaRPr lang="en-US" sz="850" dirty="0"/>
-          </a:p>
-        </p:txBody>
-      </p:sp>
-      <p:sp>
-        <p:nvSpPr>
-          <p:cNvPr id="16" name="Text 12"/>
-          <p:cNvSpPr txBox="1"/>
-          <p:nvPr/>
-        </p:nvSpPr>
-        <p:spPr>
-          <a:xfrm>
-            <a:off x="457200" y="3703320"/>
-            <a:ext cx="3931920" cy="274320"/>
+            <a:off x="4663440" y="4224528"/>
+            <a:ext cx="4023360" cy="548640"/>
           </a:xfrm>
           <a:prstGeom prst="rect">
             <a:avLst/>
@@ -10401,7 +10401,7 @@
                 <a:ea typeface="Calibri" pitchFamily="34" charset="-122"/>
                 <a:cs typeface="Calibri" pitchFamily="34" charset="-120"/>
               </a:rPr>
-              <a:t>Dark mode and Hindi are one tap from any screen.</a:t>
+              <a:t>Claim: the rule engine picks the route, the Two AI Debate checks it, and the filled claim pack downloads as a PDF.</a:t>
             </a:r>
             <a:endParaRPr lang="en-US" sz="1000" dirty="0"/>
           </a:p>

--- a/public/docs/Virasat-Team-USV-Deck.pptx
+++ b/public/docs/Virasat-Team-USV-Deck.pptx
@@ -3305,7 +3305,7 @@
                 <a:ea typeface="Cambria" pitchFamily="34" charset="-122"/>
                 <a:cs typeface="Cambria" pitchFamily="34" charset="-120"/>
               </a:rPr>
-              <a:t>₹20 a family, open rules, and every number checkable</a:t>
+              <a:t>₹33 a family, open rules, and every number checkable</a:t>
             </a:r>
             <a:endParaRPr lang="en-US" sz="2400" dirty="0"/>
           </a:p>
@@ -8050,7 +8050,7 @@
                 <a:ea typeface="Cambria" pitchFamily="34" charset="-122"/>
                 <a:cs typeface="Cambria" pitchFamily="34" charset="-120"/>
               </a:rPr>
-              <a:t>The Challenger caught what a single answer missed</a:t>
+              <a:t>Two AIs argue, and you can read the argument</a:t>
             </a:r>
             <a:endParaRPr lang="en-US" sz="2400" dirty="0"/>
           </a:p>
@@ -8425,7 +8425,7 @@
                 <a:ea typeface="Calibri" pitchFamily="34" charset="-122"/>
                 <a:cs typeface="Calibri" pitchFamily="34" charset="-120"/>
               </a:rPr>
-              <a:t>Research: multi-agent debate improves factual accuracy (Du and others, ICML 2024). Newer work warns it is not always better, so we measure it: npm run eval reports how often the Challenger catches a planted problem, with and without the debate. Both numbers are published on the site.</a:t>
+              <a:t>We measured it rather than assuming it. On 3 planted problems the Challenger caught 3 of 3, and so did a single reviewer with no debate: on cases this clear the debate added nothing to accuracy, and we publish that. The case for it is that the family can read the disagreement, and that the Referee is prevented in code from lowering a caution. Reproduce with npm run eval.</a:t>
             </a:r>
             <a:endParaRPr lang="en-US" sz="800" dirty="0"/>
           </a:p>
@@ -9481,7 +9481,7 @@
                 <a:ea typeface="Cambria" pitchFamily="34" charset="-122"/>
                 <a:cs typeface="Cambria" pitchFamily="34" charset="-120"/>
               </a:rPr>
-              <a:t>about ₹20</a:t>
+              <a:t>about ₹33</a:t>
             </a:r>
             <a:endParaRPr lang="en-US" sz="1700" dirty="0"/>
           </a:p>
@@ -11663,7 +11663,7 @@
                 <a:ea typeface="Cambria" pitchFamily="34" charset="-122"/>
                 <a:cs typeface="Cambria" pitchFamily="34" charset="-120"/>
               </a:rPr>
-              <a:t>about ₹20</a:t>
+              <a:t>about ₹33</a:t>
             </a:r>
             <a:endParaRPr lang="en-US" sz="1900" dirty="0"/>
           </a:p>
@@ -11702,7 +11702,7 @@
                 <a:ea typeface="Calibri" pitchFamily="34" charset="-122"/>
                 <a:cs typeface="Calibri" pitchFamily="34" charset="-120"/>
               </a:rPr>
-              <a:t>of AI per family, against ₹38,700 returned on average. Roughly 1,900 rupees recovered per rupee spent.</a:t>
+              <a:t>of AI per family, measured from real token counts, against ₹38,700 returned on average. Roughly 1,150 rupees recovered per rupee spent.</a:t>
             </a:r>
             <a:endParaRPr lang="en-US" sz="950" dirty="0"/>
           </a:p>

--- a/public/docs/Virasat-Team-USV-Deck.pptx
+++ b/public/docs/Virasat-Team-USV-Deck.pptx
@@ -3305,7 +3305,7 @@
                 <a:ea typeface="Cambria" pitchFamily="34" charset="-122"/>
                 <a:cs typeface="Cambria" pitchFamily="34" charset="-120"/>
               </a:rPr>
-              <a:t>₹33 a family, open rules, and every number checkable</a:t>
+              <a:t>₹36 a family, open rules, and every number checkable</a:t>
             </a:r>
             <a:endParaRPr lang="en-US" sz="2400" dirty="0"/>
           </a:p>
@@ -9481,7 +9481,7 @@
                 <a:ea typeface="Cambria" pitchFamily="34" charset="-122"/>
                 <a:cs typeface="Cambria" pitchFamily="34" charset="-120"/>
               </a:rPr>
-              <a:t>about ₹33</a:t>
+              <a:t>about ₹36</a:t>
             </a:r>
             <a:endParaRPr lang="en-US" sz="1700" dirty="0"/>
           </a:p>
@@ -11663,7 +11663,7 @@
                 <a:ea typeface="Cambria" pitchFamily="34" charset="-122"/>
                 <a:cs typeface="Cambria" pitchFamily="34" charset="-120"/>
               </a:rPr>
-              <a:t>about ₹33</a:t>
+              <a:t>about ₹36</a:t>
             </a:r>
             <a:endParaRPr lang="en-US" sz="1900" dirty="0"/>
           </a:p>
@@ -11702,7 +11702,7 @@
                 <a:ea typeface="Calibri" pitchFamily="34" charset="-122"/>
                 <a:cs typeface="Calibri" pitchFamily="34" charset="-120"/>
               </a:rPr>
-              <a:t>of AI per family, measured from real token counts, against ₹38,700 returned on average. Roughly 1,150 rupees recovered per rupee spent.</a:t>
+              <a:t>of AI per family, measured from real token counts against the live API, versus ₹38,700 returned on average. Roughly 1,060 rupees recovered per rupee spent.</a:t>
             </a:r>
             <a:endParaRPr lang="en-US" sz="950" dirty="0"/>
           </a:p>

--- a/public/docs/Virasat-Team-USV-Deck.pptx
+++ b/public/docs/Virasat-Team-USV-Deck.pptx
@@ -5819,7 +5819,7 @@
                 <a:ea typeface="Cambria" pitchFamily="34" charset="-122"/>
                 <a:cs typeface="Cambria" pitchFamily="34" charset="-120"/>
               </a:rPr>
-              <a:t>8.5 lakh</a:t>
+              <a:t>20 lakh</a:t>
             </a:r>
             <a:endParaRPr lang="en-US" sz="2300" dirty="0"/>
           </a:p>

--- a/public/docs/Virasat-Team-USV-Deck.pptx
+++ b/public/docs/Virasat-Team-USV-Deck.pptx
@@ -3495,7 +3495,7 @@
                 <a:ea typeface="Calibri" pitchFamily="34" charset="-122"/>
                 <a:cs typeface="Calibri" pitchFamily="34" charset="-120"/>
               </a:rPr>
-              <a:t>Two AI reviewers, 3 claim routes</a:t>
+              <a:t>The AI Review, 3 claim routes</a:t>
             </a:r>
             <a:endParaRPr lang="en-US" sz="1000" dirty="0"/>
           </a:p>
@@ -5239,7 +5239,7 @@
                 <a:ea typeface="Cambria" pitchFamily="34" charset="-122"/>
                 <a:cs typeface="Cambria" pitchFamily="34" charset="-120"/>
               </a:rPr>
-              <a:t>47 tests</a:t>
+              <a:t>53 tests</a:t>
             </a:r>
             <a:endParaRPr lang="en-US" sz="2400" dirty="0"/>
           </a:p>
@@ -7647,7 +7647,7 @@
                 <a:ea typeface="Calibri" pitchFamily="34" charset="-122"/>
                 <a:cs typeface="Calibri" pitchFamily="34" charset="-120"/>
               </a:rPr>
-              <a:t>The Two AI Debate</a:t>
+              <a:t>The AI Review</a:t>
             </a:r>
             <a:endParaRPr lang="en-US" sz="1400" dirty="0"/>
           </a:p>
@@ -8011,7 +8011,7 @@
                 <a:ea typeface="Calibri" pitchFamily="34" charset="-122"/>
                 <a:cs typeface="Calibri" pitchFamily="34" charset="-120"/>
               </a:rPr>
-              <a:t>03  ·  INNOVATION: THE TWO AI DEBATE</a:t>
+              <a:t>03  ·  INNOVATION: THE AI REVIEW</a:t>
             </a:r>
             <a:endParaRPr lang="en-US" sz="1100" dirty="0"/>
           </a:p>
@@ -8050,7 +8050,7 @@
                 <a:ea typeface="Cambria" pitchFamily="34" charset="-122"/>
                 <a:cs typeface="Cambria" pitchFamily="34" charset="-120"/>
               </a:rPr>
-              <a:t>Two AIs argue, and you can read the argument</a:t>
+              <a:t>Virasat challenges its own guidance before a family acts</a:t>
             </a:r>
             <a:endParaRPr lang="en-US" sz="2400" dirty="0"/>
           </a:p>
@@ -9145,7 +9145,7 @@
                 <a:ea typeface="Cambria" pitchFamily="34" charset="-122"/>
                 <a:cs typeface="Cambria" pitchFamily="34" charset="-120"/>
               </a:rPr>
-              <a:t>47</a:t>
+              <a:t>53</a:t>
             </a:r>
             <a:endParaRPr lang="en-US" sz="1700" dirty="0"/>
           </a:p>
@@ -10401,7 +10401,7 @@
                 <a:ea typeface="Calibri" pitchFamily="34" charset="-122"/>
                 <a:cs typeface="Calibri" pitchFamily="34" charset="-120"/>
               </a:rPr>
-              <a:t>Claim: the rule engine picks the route, the Two AI Debate checks it, and the filled claim pack downloads as a PDF.</a:t>
+              <a:t>Claim: the rule engine picks the route, the AI Review checks it, and the filled claim pack downloads as a PDF.</a:t>
             </a:r>
             <a:endParaRPr lang="en-US" sz="1000" dirty="0"/>
           </a:p>

--- a/public/docs/Virasat-Team-USV-Deck.pptx
+++ b/public/docs/Virasat-Team-USV-Deck.pptx
@@ -2196,7 +2196,7 @@
         </p:nvSpPr>
         <p:spPr>
           <a:xfrm>
-            <a:off x="548640" y="3931920"/>
+            <a:off x="548640" y="4096512"/>
             <a:ext cx="3657600" cy="274320"/>
           </a:xfrm>
           <a:prstGeom prst="rect">
@@ -2235,7 +2235,7 @@
         </p:nvSpPr>
         <p:spPr>
           <a:xfrm>
-            <a:off x="548640" y="4279392"/>
+            <a:off x="548640" y="4425696"/>
             <a:ext cx="5486400" cy="274320"/>
           </a:xfrm>
           <a:prstGeom prst="rect">
@@ -2276,7 +2276,7 @@
         </p:nvSpPr>
         <p:spPr>
           <a:xfrm>
-            <a:off x="548640" y="3291840"/>
+            <a:off x="548640" y="3127248"/>
             <a:ext cx="4572000" cy="292608"/>
           </a:xfrm>
           <a:prstGeom prst="rect">
@@ -2324,26 +2324,26 @@
         </p:nvSpPr>
         <p:spPr>
           <a:xfrm>
-            <a:off x="548640" y="3611880"/>
-            <a:ext cx="4572000" cy="274320"/>
-          </a:xfrm>
-          <a:prstGeom prst="rect">
-            <a:avLst/>
-          </a:prstGeom>
-          <a:noFill/>
-          <a:ln/>
-        </p:spPr>
-        <p:txBody>
-          <a:bodyPr wrap="square" lIns="0" tIns="0" rIns="0" bIns="0" rtlCol="0" anchor="t"/>
-          <a:lstStyle/>
-          <a:p>
-            <a:pPr indent="0" marL="0">
-              <a:buNone/>
-            </a:pPr>
-            <a:r>
-              <a:rPr lang="en-US" sz="1100" u="sng" dirty="0">
-                <a:solidFill>
-                  <a:srgbClr val="CFE3DF"/>
+            <a:off x="548640" y="3438144"/>
+            <a:ext cx="4937760" cy="274320"/>
+          </a:xfrm>
+          <a:prstGeom prst="rect">
+            <a:avLst/>
+          </a:prstGeom>
+          <a:noFill/>
+          <a:ln/>
+        </p:spPr>
+        <p:txBody>
+          <a:bodyPr wrap="square" lIns="0" tIns="0" rIns="0" bIns="0" rtlCol="0" anchor="t"/>
+          <a:lstStyle/>
+          <a:p>
+            <a:pPr indent="0" marL="0">
+              <a:buNone/>
+            </a:pPr>
+            <a:r>
+              <a:rPr lang="en-US" sz="1150" b="1" u="sng" dirty="0">
+                <a:solidFill>
+                  <a:srgbClr val="FFFFFF"/>
                 </a:solidFill>
                 <a:latin typeface="Calibri" pitchFamily="34" charset="0"/>
                 <a:ea typeface="Calibri" pitchFamily="34" charset="-122"/>
@@ -2356,6 +2356,54 @@
                   </a:extLst>
                 </a:hlinkClick>
               </a:rPr>
+              <a:t>Watch the 3 minute demo: youtu.be/CMpV2y9Zoxk</a:t>
+            </a:r>
+            <a:endParaRPr lang="en-US" sz="1150" dirty="0"/>
+          </a:p>
+        </p:txBody>
+      </p:sp>
+      <p:sp>
+        <p:nvSpPr>
+          <p:cNvPr id="10" name="Text 8">
+            <a:hlinkClick r:id="rId3" tooltip=""/>
+          </p:cNvPr>
+          <p:cNvSpPr txBox="1"/>
+          <p:nvPr/>
+        </p:nvSpPr>
+        <p:spPr>
+          <a:xfrm>
+            <a:off x="548640" y="3730752"/>
+            <a:ext cx="4572000" cy="274320"/>
+          </a:xfrm>
+          <a:prstGeom prst="rect">
+            <a:avLst/>
+          </a:prstGeom>
+          <a:noFill/>
+          <a:ln/>
+        </p:spPr>
+        <p:txBody>
+          <a:bodyPr wrap="square" lIns="0" tIns="0" rIns="0" bIns="0" rtlCol="0" anchor="t"/>
+          <a:lstStyle/>
+          <a:p>
+            <a:pPr indent="0" marL="0">
+              <a:buNone/>
+            </a:pPr>
+            <a:r>
+              <a:rPr lang="en-US" sz="1100" u="sng" dirty="0">
+                <a:solidFill>
+                  <a:srgbClr val="CFE3DF"/>
+                </a:solidFill>
+                <a:latin typeface="Calibri" pitchFamily="34" charset="0"/>
+                <a:ea typeface="Calibri" pitchFamily="34" charset="-122"/>
+                <a:cs typeface="Calibri" pitchFamily="34" charset="-120"/>
+                <a:hlinkClick r:id="rId3" invalidUrl="" action="" tgtFrame="" tooltip="" history="1" highlightClick="0" endSnd="0">
+                  <a:extLst>
+                    <a:ext uri="{A12FA001-AC4F-418D-AE19-62706E023703}">
+                      <ahyp:hlinkClr xmlns:ahyp="http://schemas.microsoft.com/office/drawing/2018/hyperlinkcolor" val="tx"/>
+                    </a:ext>
+                  </a:extLst>
+                </a:hlinkClick>
+              </a:rPr>
               <a:t>Code: github.com/usv240/virasat</a:t>
             </a:r>
             <a:endParaRPr lang="en-US" sz="1100" dirty="0"/>
@@ -2364,7 +2412,7 @@
       </p:sp>
       <p:sp>
         <p:nvSpPr>
-          <p:cNvPr id="10" name="Shape 8"/>
+          <p:cNvPr id="11" name="Shape 9"/>
           <p:cNvSpPr/>
           <p:nvPr/>
         </p:nvSpPr>
@@ -2398,14 +2446,14 @@
       </p:sp>
       <p:pic>
         <p:nvPicPr>
-          <p:cNvPr id="11" name="Image 0" descr="preencoded.png">    </p:cNvPr>
+          <p:cNvPr id="12" name="Image 0" descr="preencoded.png">    </p:cNvPr>
           <p:cNvPicPr>
             <a:picLocks noChangeAspect="1"/>
           </p:cNvPicPr>
           <p:nvPr/>
         </p:nvPicPr>
         <p:blipFill>
-          <a:blip r:embed="rId3"/>
+          <a:blip r:embed="rId4"/>
           <a:stretch>
             <a:fillRect/>
           </a:stretch>
@@ -2422,7 +2470,7 @@
       </p:pic>
       <p:sp>
         <p:nvSpPr>
-          <p:cNvPr id="12" name="Text 9"/>
+          <p:cNvPr id="13" name="Text 10"/>
           <p:cNvSpPr txBox="1"/>
           <p:nvPr/>
         </p:nvSpPr>

--- a/public/docs/Virasat-Team-USV-Deck.pptx
+++ b/public/docs/Virasat-Team-USV-Deck.pptx
@@ -3504,7 +3504,7 @@
                 <a:ea typeface="Calibri" pitchFamily="34" charset="-122"/>
                 <a:cs typeface="Calibri" pitchFamily="34" charset="-120"/>
               </a:rPr>
-              <a:t>₹5.17</a:t>
+              <a:t>₹4.07</a:t>
             </a:r>
             <a:endParaRPr lang="en-US" sz="1050" dirty="0"/>
           </a:p>
@@ -3582,7 +3582,7 @@
                 <a:ea typeface="Calibri" pitchFamily="34" charset="-122"/>
                 <a:cs typeface="Calibri" pitchFamily="34" charset="-120"/>
               </a:rPr>
-              <a:t>₹14.82</a:t>
+              <a:t>₹28.96</a:t>
             </a:r>
             <a:endParaRPr lang="en-US" sz="1050" dirty="0"/>
           </a:p>
@@ -3738,7 +3738,7 @@
                 <a:ea typeface="Calibri" pitchFamily="34" charset="-122"/>
                 <a:cs typeface="Calibri" pitchFamily="34" charset="-120"/>
               </a:rPr>
-              <a:t>₹19.99</a:t>
+              <a:t>₹33.04 warm, ₹36.44 cold</a:t>
             </a:r>
             <a:endParaRPr lang="en-US" sz="1300" dirty="0"/>
           </a:p>
@@ -4040,7 +4040,7 @@
                 <a:ea typeface="Calibri" pitchFamily="34" charset="-122"/>
                 <a:cs typeface="Calibri" pitchFamily="34" charset="-120"/>
               </a:rPr>
-              <a:t>It goes down, not up, with scale: overnight work moves to the Batch API at half price, and a clear printed passbook does not need the largest model. About ₹4 a family at the lowest setting.</a:t>
+              <a:t>It goes down, not up, with scale: overnight work moves to the Batch API at half price, and a clear printed passbook does not need the largest model. About ₹12 a family at the lowest measured setting.</a:t>
             </a:r>
             <a:endParaRPr lang="en-US" sz="900" dirty="0"/>
           </a:p>
@@ -5287,7 +5287,7 @@
                 <a:ea typeface="Cambria" pitchFamily="34" charset="-122"/>
                 <a:cs typeface="Cambria" pitchFamily="34" charset="-120"/>
               </a:rPr>
-              <a:t>53 tests</a:t>
+              <a:t>57 tests</a:t>
             </a:r>
             <a:endParaRPr lang="en-US" sz="2400" dirty="0"/>
           </a:p>
@@ -9193,7 +9193,7 @@
                 <a:ea typeface="Cambria" pitchFamily="34" charset="-122"/>
                 <a:cs typeface="Cambria" pitchFamily="34" charset="-120"/>
               </a:rPr>
-              <a:t>53</a:t>
+              <a:t>57</a:t>
             </a:r>
             <a:endParaRPr lang="en-US" sz="1700" dirty="0"/>
           </a:p>
@@ -11750,7 +11750,7 @@
                 <a:ea typeface="Calibri" pitchFamily="34" charset="-122"/>
                 <a:cs typeface="Calibri" pitchFamily="34" charset="-120"/>
               </a:rPr>
-              <a:t>of AI per family, measured from real token counts against the live API, versus ₹38,700 returned on average. Roughly 1,060 rupees recovered per rupee spent.</a:t>
+              <a:t>of AI per family, measured from real token counts against the live API, versus ₹38,700 returned on average. Roughly 1,062 rupees recovered per rupee spent.</a:t>
             </a:r>
             <a:endParaRPr lang="en-US" sz="950" dirty="0"/>
           </a:p>
